--- a/docs/highlights_deck/paichan_editable.pptx
+++ b/docs/highlights_deck/paichan_editable.pptx
@@ -3741,7 +3741,7 @@
           </a:fontRef>
         </p:style>
         <p:txBody>
-          <a:bodyPr rtlCol="0" anchor="ctr" wrap="square" lIns="310896" rIns="54864" tIns="18288" bIns="18288"/>
+          <a:bodyPr rtlCol="0" anchor="ctr" wrap="square" lIns="164592" rIns="54864" tIns="18288" bIns="18288"/>
           <a:lstStyle/>
           <a:p>
             <a:pPr algn="l"/>
@@ -3885,7 +3885,7 @@
           </a:fontRef>
         </p:style>
         <p:txBody>
-          <a:bodyPr rtlCol="0" anchor="ctr" wrap="square" lIns="310896" rIns="54864" tIns="18288" bIns="18288"/>
+          <a:bodyPr rtlCol="0" anchor="ctr" wrap="square" lIns="164592" rIns="54864" tIns="18288" bIns="18288"/>
           <a:lstStyle/>
           <a:p>
             <a:pPr algn="l"/>
@@ -4029,7 +4029,7 @@
           </a:fontRef>
         </p:style>
         <p:txBody>
-          <a:bodyPr rtlCol="0" anchor="ctr" wrap="square" lIns="310896" rIns="54864" tIns="18288" bIns="18288"/>
+          <a:bodyPr rtlCol="0" anchor="ctr" wrap="square" lIns="164592" rIns="54864" tIns="18288" bIns="18288"/>
           <a:lstStyle/>
           <a:p>
             <a:pPr algn="l"/>
@@ -4173,7 +4173,7 @@
           </a:fontRef>
         </p:style>
         <p:txBody>
-          <a:bodyPr rtlCol="0" anchor="ctr" wrap="square" lIns="310896" rIns="54864" tIns="18288" bIns="18288"/>
+          <a:bodyPr rtlCol="0" anchor="ctr" wrap="square" lIns="164592" rIns="54864" tIns="18288" bIns="18288"/>
           <a:lstStyle/>
           <a:p>
             <a:pPr algn="l"/>
@@ -4317,7 +4317,7 @@
           </a:fontRef>
         </p:style>
         <p:txBody>
-          <a:bodyPr rtlCol="0" anchor="ctr" wrap="square" lIns="310896" rIns="54864" tIns="18288" bIns="18288"/>
+          <a:bodyPr rtlCol="0" anchor="ctr" wrap="square" lIns="164592" rIns="54864" tIns="18288" bIns="18288"/>
           <a:lstStyle/>
           <a:p>
             <a:pPr algn="l"/>
@@ -4461,7 +4461,7 @@
           </a:fontRef>
         </p:style>
         <p:txBody>
-          <a:bodyPr rtlCol="0" anchor="ctr" wrap="square" lIns="310896" rIns="54864" tIns="18288" bIns="18288"/>
+          <a:bodyPr rtlCol="0" anchor="ctr" wrap="square" lIns="164592" rIns="54864" tIns="18288" bIns="18288"/>
           <a:lstStyle/>
           <a:p>
             <a:pPr algn="l"/>
@@ -5018,7 +5018,7 @@
                 <a:ea typeface="PingFang SC"/>
                 <a:cs typeface="PingFang SC"/>
               </a:rPr>
-              <a:t>  Batch PPQ1</a:t>
+              <a:t>Batch PPQ1</a:t>
             </a:r>
           </a:p>
         </p:txBody>
@@ -5157,7 +5157,7 @@
                 <a:ea typeface="PingFang SC"/>
                 <a:cs typeface="PingFang SC"/>
               </a:rPr>
-              <a:t>  Batch PPQ2</a:t>
+              <a:t>Batch PPQ2</a:t>
             </a:r>
           </a:p>
         </p:txBody>
@@ -5296,7 +5296,7 @@
                 <a:ea typeface="PingFang SC"/>
                 <a:cs typeface="PingFang SC"/>
               </a:rPr>
-              <a:t>  Batch PPQ3</a:t>
+              <a:t>Batch PPQ3</a:t>
             </a:r>
           </a:p>
         </p:txBody>
@@ -5435,7 +5435,7 @@
                 <a:ea typeface="PingFang SC"/>
                 <a:cs typeface="PingFang SC"/>
               </a:rPr>
-              <a:t>  Batch PPQ4</a:t>
+              <a:t>Batch PPQ4</a:t>
             </a:r>
           </a:p>
         </p:txBody>
@@ -5874,7 +5874,7 @@
                 <a:ea typeface="PingFang SC"/>
                 <a:cs typeface="PingFang SC"/>
               </a:rPr>
-              <a:t>  Batch PPQ1</a:t>
+              <a:t>Batch PPQ1</a:t>
             </a:r>
           </a:p>
         </p:txBody>
@@ -5977,7 +5977,7 @@
                 <a:ea typeface="PingFang SC"/>
                 <a:cs typeface="PingFang SC"/>
               </a:rPr>
-              <a:t>  Batch PPQ2</a:t>
+              <a:t>Batch PPQ2</a:t>
             </a:r>
           </a:p>
         </p:txBody>
@@ -6080,7 +6080,7 @@
                 <a:ea typeface="PingFang SC"/>
                 <a:cs typeface="PingFang SC"/>
               </a:rPr>
-              <a:t>  Batch PPQ3</a:t>
+              <a:t>Batch PPQ3</a:t>
             </a:r>
           </a:p>
         </p:txBody>
@@ -6183,7 +6183,7 @@
                 <a:ea typeface="PingFang SC"/>
                 <a:cs typeface="PingFang SC"/>
               </a:rPr>
-              <a:t>  Batch PPQ4</a:t>
+              <a:t>Batch PPQ4</a:t>
             </a:r>
           </a:p>
         </p:txBody>
@@ -6947,7 +6947,7 @@
           </a:fontRef>
         </p:style>
         <p:txBody>
-          <a:bodyPr rtlCol="0" anchor="ctr" wrap="square" lIns="310896" rIns="54864" tIns="18288" bIns="18288"/>
+          <a:bodyPr rtlCol="0" anchor="ctr" wrap="square" lIns="365760" rIns="54864" tIns="18288" bIns="18288"/>
           <a:lstStyle/>
           <a:p>
             <a:pPr algn="l"/>
@@ -6960,7 +6960,7 @@
                 <a:ea typeface="PingFang SC"/>
                 <a:cs typeface="PingFang SC"/>
               </a:rPr>
-              <a:t>   Batch PPQ1</a:t>
+              <a:t>Batch PPQ1</a:t>
             </a:r>
           </a:p>
         </p:txBody>
@@ -7063,7 +7063,7 @@
                 <a:ea typeface="PingFang SC"/>
                 <a:cs typeface="PingFang SC"/>
               </a:rPr>
-              <a:t>   Media Task A</a:t>
+              <a:t>Media Task A</a:t>
             </a:r>
           </a:p>
         </p:txBody>
@@ -7166,7 +7166,7 @@
                 <a:ea typeface="PingFang SC"/>
                 <a:cs typeface="PingFang SC"/>
               </a:rPr>
-              <a:t>   Buffer Task A</a:t>
+              <a:t>Buffer Task A</a:t>
             </a:r>
           </a:p>
         </p:txBody>
@@ -7269,7 +7269,7 @@
                 <a:ea typeface="PingFang SC"/>
                 <a:cs typeface="PingFang SC"/>
               </a:rPr>
-              <a:t>   USP Task A</a:t>
+              <a:t>USP Task A</a:t>
             </a:r>
           </a:p>
         </p:txBody>
@@ -7372,7 +7372,7 @@
                 <a:ea typeface="PingFang SC"/>
                 <a:cs typeface="PingFang SC"/>
               </a:rPr>
-              <a:t>   USP Task B</a:t>
+              <a:t>USP Task B</a:t>
             </a:r>
           </a:p>
         </p:txBody>
@@ -7475,7 +7475,7 @@
                 <a:ea typeface="PingFang SC"/>
                 <a:cs typeface="PingFang SC"/>
               </a:rPr>
-              <a:t>   DSP Task A</a:t>
+              <a:t>DSP Task A</a:t>
             </a:r>
           </a:p>
         </p:txBody>
@@ -7578,7 +7578,7 @@
                 <a:ea typeface="PingFang SC"/>
                 <a:cs typeface="PingFang SC"/>
               </a:rPr>
-              <a:t>   DSP Task B</a:t>
+              <a:t>DSP Task B</a:t>
             </a:r>
           </a:p>
         </p:txBody>
@@ -7704,7 +7704,7 @@
           </a:fontRef>
         </p:style>
         <p:txBody>
-          <a:bodyPr rtlCol="0" anchor="ctr" wrap="square" lIns="310896" rIns="54864" tIns="18288" bIns="18288"/>
+          <a:bodyPr rtlCol="0" anchor="ctr" wrap="square" lIns="365760" rIns="54864" tIns="18288" bIns="18288"/>
           <a:lstStyle/>
           <a:p>
             <a:pPr algn="l"/>
@@ -7717,7 +7717,7 @@
                 <a:ea typeface="PingFang SC"/>
                 <a:cs typeface="PingFang SC"/>
               </a:rPr>
-              <a:t>   Batch PPQ2</a:t>
+              <a:t>Batch PPQ2</a:t>
             </a:r>
           </a:p>
         </p:txBody>
@@ -7820,7 +7820,7 @@
                 <a:ea typeface="PingFang SC"/>
                 <a:cs typeface="PingFang SC"/>
               </a:rPr>
-              <a:t>   Media Task A</a:t>
+              <a:t>Media Task A</a:t>
             </a:r>
           </a:p>
         </p:txBody>
@@ -7923,7 +7923,7 @@
                 <a:ea typeface="PingFang SC"/>
                 <a:cs typeface="PingFang SC"/>
               </a:rPr>
-              <a:t>   Buffer Task A</a:t>
+              <a:t>Buffer Task A</a:t>
             </a:r>
           </a:p>
         </p:txBody>
@@ -8026,7 +8026,7 @@
                 <a:ea typeface="PingFang SC"/>
                 <a:cs typeface="PingFang SC"/>
               </a:rPr>
-              <a:t>   USP Task A</a:t>
+              <a:t>USP Task A</a:t>
             </a:r>
           </a:p>
         </p:txBody>
@@ -8129,7 +8129,7 @@
                 <a:ea typeface="PingFang SC"/>
                 <a:cs typeface="PingFang SC"/>
               </a:rPr>
-              <a:t>   USP Task B</a:t>
+              <a:t>USP Task B</a:t>
             </a:r>
           </a:p>
         </p:txBody>
@@ -8232,7 +8232,7 @@
                 <a:ea typeface="PingFang SC"/>
                 <a:cs typeface="PingFang SC"/>
               </a:rPr>
-              <a:t>   DSP Task A</a:t>
+              <a:t>DSP Task A</a:t>
             </a:r>
           </a:p>
         </p:txBody>
@@ -8335,7 +8335,7 @@
                 <a:ea typeface="PingFang SC"/>
                 <a:cs typeface="PingFang SC"/>
               </a:rPr>
-              <a:t>   DSP Task B</a:t>
+              <a:t>DSP Task B</a:t>
             </a:r>
           </a:p>
         </p:txBody>
@@ -8461,7 +8461,7 @@
           </a:fontRef>
         </p:style>
         <p:txBody>
-          <a:bodyPr rtlCol="0" anchor="ctr" wrap="square" lIns="310896" rIns="54864" tIns="18288" bIns="18288"/>
+          <a:bodyPr rtlCol="0" anchor="ctr" wrap="square" lIns="365760" rIns="54864" tIns="18288" bIns="18288"/>
           <a:lstStyle/>
           <a:p>
             <a:pPr algn="l"/>
@@ -8474,7 +8474,7 @@
                 <a:ea typeface="PingFang SC"/>
                 <a:cs typeface="PingFang SC"/>
               </a:rPr>
-              <a:t>   Batch PPQ3</a:t>
+              <a:t>Batch PPQ3</a:t>
             </a:r>
           </a:p>
         </p:txBody>
@@ -8577,7 +8577,7 @@
                 <a:ea typeface="PingFang SC"/>
                 <a:cs typeface="PingFang SC"/>
               </a:rPr>
-              <a:t>   Media Task A</a:t>
+              <a:t>Media Task A</a:t>
             </a:r>
           </a:p>
         </p:txBody>
@@ -8680,7 +8680,7 @@
                 <a:ea typeface="PingFang SC"/>
                 <a:cs typeface="PingFang SC"/>
               </a:rPr>
-              <a:t>   Buffer Task A</a:t>
+              <a:t>Buffer Task A</a:t>
             </a:r>
           </a:p>
         </p:txBody>
@@ -8783,7 +8783,7 @@
                 <a:ea typeface="PingFang SC"/>
                 <a:cs typeface="PingFang SC"/>
               </a:rPr>
-              <a:t>   USP Task A</a:t>
+              <a:t>USP Task A</a:t>
             </a:r>
           </a:p>
         </p:txBody>
@@ -8886,7 +8886,7 @@
                 <a:ea typeface="PingFang SC"/>
                 <a:cs typeface="PingFang SC"/>
               </a:rPr>
-              <a:t>   USP Task B</a:t>
+              <a:t>USP Task B</a:t>
             </a:r>
           </a:p>
         </p:txBody>
@@ -8989,7 +8989,7 @@
                 <a:ea typeface="PingFang SC"/>
                 <a:cs typeface="PingFang SC"/>
               </a:rPr>
-              <a:t>   DSP Task A</a:t>
+              <a:t>DSP Task A</a:t>
             </a:r>
           </a:p>
         </p:txBody>
@@ -9092,7 +9092,7 @@
                 <a:ea typeface="PingFang SC"/>
                 <a:cs typeface="PingFang SC"/>
               </a:rPr>
-              <a:t>   DSP Task B</a:t>
+              <a:t>DSP Task B</a:t>
             </a:r>
           </a:p>
         </p:txBody>
@@ -9218,7 +9218,7 @@
           </a:fontRef>
         </p:style>
         <p:txBody>
-          <a:bodyPr rtlCol="0" anchor="ctr" wrap="square" lIns="310896" rIns="54864" tIns="18288" bIns="18288"/>
+          <a:bodyPr rtlCol="0" anchor="ctr" wrap="square" lIns="365760" rIns="54864" tIns="18288" bIns="18288"/>
           <a:lstStyle/>
           <a:p>
             <a:pPr algn="l"/>
@@ -9231,7 +9231,7 @@
                 <a:ea typeface="PingFang SC"/>
                 <a:cs typeface="PingFang SC"/>
               </a:rPr>
-              <a:t>   Batch PPQ4</a:t>
+              <a:t>Batch PPQ4</a:t>
             </a:r>
           </a:p>
         </p:txBody>
@@ -9334,7 +9334,7 @@
                 <a:ea typeface="PingFang SC"/>
                 <a:cs typeface="PingFang SC"/>
               </a:rPr>
-              <a:t>   Media Task A</a:t>
+              <a:t>Media Task A</a:t>
             </a:r>
           </a:p>
         </p:txBody>
@@ -9437,7 +9437,7 @@
                 <a:ea typeface="PingFang SC"/>
                 <a:cs typeface="PingFang SC"/>
               </a:rPr>
-              <a:t>   Buffer Task A</a:t>
+              <a:t>Buffer Task A</a:t>
             </a:r>
           </a:p>
         </p:txBody>
@@ -9540,7 +9540,7 @@
                 <a:ea typeface="PingFang SC"/>
                 <a:cs typeface="PingFang SC"/>
               </a:rPr>
-              <a:t>   USP Task A</a:t>
+              <a:t>USP Task A</a:t>
             </a:r>
           </a:p>
         </p:txBody>
@@ -9643,7 +9643,7 @@
                 <a:ea typeface="PingFang SC"/>
                 <a:cs typeface="PingFang SC"/>
               </a:rPr>
-              <a:t>   USP Task B</a:t>
+              <a:t>USP Task B</a:t>
             </a:r>
           </a:p>
         </p:txBody>
@@ -9746,7 +9746,7 @@
                 <a:ea typeface="PingFang SC"/>
                 <a:cs typeface="PingFang SC"/>
               </a:rPr>
-              <a:t>   DSP Task A</a:t>
+              <a:t>DSP Task A</a:t>
             </a:r>
           </a:p>
         </p:txBody>
@@ -9849,7 +9849,7 @@
                 <a:ea typeface="PingFang SC"/>
                 <a:cs typeface="PingFang SC"/>
               </a:rPr>
-              <a:t>   DSP Task B</a:t>
+              <a:t>DSP Task B</a:t>
             </a:r>
           </a:p>
         </p:txBody>
@@ -10283,7 +10283,7 @@
           </a:fontRef>
         </p:style>
         <p:txBody>
-          <a:bodyPr rtlCol="0" anchor="ctr" wrap="square" lIns="310896" rIns="54864" tIns="18288" bIns="18288"/>
+          <a:bodyPr rtlCol="0" anchor="ctr" wrap="square" lIns="128016" rIns="54864" tIns="18288" bIns="18288"/>
           <a:lstStyle/>
           <a:p>
             <a:pPr algn="l"/>
@@ -10399,7 +10399,7 @@
           </a:fontRef>
         </p:style>
         <p:txBody>
-          <a:bodyPr rtlCol="0" anchor="ctr" wrap="square" lIns="310896" rIns="54864" tIns="18288" bIns="18288"/>
+          <a:bodyPr rtlCol="0" anchor="ctr" wrap="square" lIns="128016" rIns="54864" tIns="18288" bIns="18288"/>
           <a:lstStyle/>
           <a:p>
             <a:pPr algn="l"/>
@@ -10515,7 +10515,7 @@
           </a:fontRef>
         </p:style>
         <p:txBody>
-          <a:bodyPr rtlCol="0" anchor="ctr" wrap="square" lIns="310896" rIns="54864" tIns="18288" bIns="18288"/>
+          <a:bodyPr rtlCol="0" anchor="ctr" wrap="square" lIns="128016" rIns="54864" tIns="18288" bIns="18288"/>
           <a:lstStyle/>
           <a:p>
             <a:pPr algn="l"/>
@@ -10737,7 +10737,7 @@
           </a:fontRef>
         </p:style>
         <p:txBody>
-          <a:bodyPr rtlCol="0" anchor="ctr" wrap="square" lIns="310896" rIns="54864" tIns="18288" bIns="18288"/>
+          <a:bodyPr rtlCol="0" anchor="ctr" wrap="square" lIns="128016" rIns="54864" tIns="18288" bIns="18288"/>
           <a:lstStyle/>
           <a:p>
             <a:pPr algn="l"/>
@@ -10853,7 +10853,7 @@
           </a:fontRef>
         </p:style>
         <p:txBody>
-          <a:bodyPr rtlCol="0" anchor="ctr" wrap="square" lIns="310896" rIns="54864" tIns="18288" bIns="18288"/>
+          <a:bodyPr rtlCol="0" anchor="ctr" wrap="square" lIns="128016" rIns="54864" tIns="18288" bIns="18288"/>
           <a:lstStyle/>
           <a:p>
             <a:pPr algn="l"/>
@@ -11075,7 +11075,7 @@
           </a:fontRef>
         </p:style>
         <p:txBody>
-          <a:bodyPr rtlCol="0" anchor="ctr" wrap="square" lIns="310896" rIns="54864" tIns="18288" bIns="18288"/>
+          <a:bodyPr rtlCol="0" anchor="ctr" wrap="square" lIns="128016" rIns="54864" tIns="18288" bIns="18288"/>
           <a:lstStyle/>
           <a:p>
             <a:pPr algn="l"/>
@@ -11191,7 +11191,7 @@
           </a:fontRef>
         </p:style>
         <p:txBody>
-          <a:bodyPr rtlCol="0" anchor="ctr" wrap="square" lIns="310896" rIns="54864" tIns="18288" bIns="18288"/>
+          <a:bodyPr rtlCol="0" anchor="ctr" wrap="square" lIns="128016" rIns="54864" tIns="18288" bIns="18288"/>
           <a:lstStyle/>
           <a:p>
             <a:pPr algn="l"/>
@@ -11262,6 +11262,623 @@
                 <a:cs typeface="PingFang SC"/>
               </a:rPr>
               <a:t>L1</a:t>
+            </a:r>
+          </a:p>
+        </p:txBody>
+      </p:sp>
+      <p:sp>
+        <p:nvSpPr>
+          <p:cNvPr id="27" name="TextBox 26"/>
+          <p:cNvSpPr txBox="1"/>
+          <p:nvPr/>
+        </p:nvSpPr>
+        <p:spPr>
+          <a:xfrm>
+            <a:off x="914400" y="5138928"/>
+            <a:ext cx="10362895" cy="274320"/>
+          </a:xfrm>
+          <a:prstGeom prst="rect">
+            <a:avLst/>
+          </a:prstGeom>
+          <a:noFill/>
+        </p:spPr>
+        <p:txBody>
+          <a:bodyPr wrap="square" anchor="t" lIns="0" rIns="0" tIns="0" bIns="0">
+            <a:spAutoFit/>
+          </a:bodyPr>
+          <a:lstStyle/>
+          <a:p>
+            <a:pPr algn="ctr">
+              <a:lnSpc>
+                <a:spcPct val="105000"/>
+              </a:lnSpc>
+            </a:pPr>
+            <a:r>
+              <a:rPr sz="1200" b="1">
+                <a:solidFill>
+                  <a:srgbClr val="86868B"/>
+                </a:solidFill>
+                <a:latin typeface="PingFang SC"/>
+                <a:ea typeface="PingFang SC"/>
+                <a:cs typeface="PingFang SC"/>
+              </a:rPr>
+              <a:t>资质等级 · 0 – 5 级</a:t>
+            </a:r>
+          </a:p>
+        </p:txBody>
+      </p:sp>
+      <p:sp>
+        <p:nvSpPr>
+          <p:cNvPr id="28" name="Oval 27"/>
+          <p:cNvSpPr/>
+          <p:nvPr/>
+        </p:nvSpPr>
+        <p:spPr>
+          <a:xfrm>
+            <a:off x="1171803" y="5468112"/>
+            <a:ext cx="475488" cy="475488"/>
+          </a:xfrm>
+          <a:prstGeom prst="ellipse">
+            <a:avLst/>
+          </a:prstGeom>
+          <a:solidFill>
+            <a:srgbClr val="C4C8CF"/>
+          </a:solidFill>
+          <a:ln>
+            <a:noFill/>
+          </a:ln>
+          <a:effectLst/>
+        </p:spPr>
+        <p:style>
+          <a:lnRef idx="1">
+            <a:schemeClr val="accent1"/>
+          </a:lnRef>
+          <a:fillRef idx="3">
+            <a:schemeClr val="accent1"/>
+          </a:fillRef>
+          <a:effectRef idx="2">
+            <a:schemeClr val="accent1"/>
+          </a:effectRef>
+          <a:fontRef idx="minor">
+            <a:schemeClr val="lt1"/>
+          </a:fontRef>
+        </p:style>
+        <p:txBody>
+          <a:bodyPr rtlCol="0" anchor="ctr" wrap="square" lIns="54864" rIns="54864" tIns="18288" bIns="18288"/>
+          <a:lstStyle/>
+          <a:p>
+            <a:pPr algn="ctr"/>
+            <a:r>
+              <a:rPr sz="1500" b="1">
+                <a:solidFill>
+                  <a:srgbClr val="FFFFFF"/>
+                </a:solidFill>
+                <a:latin typeface="PingFang SC"/>
+                <a:ea typeface="PingFang SC"/>
+                <a:cs typeface="PingFang SC"/>
+              </a:rPr>
+              <a:t>0</a:t>
+            </a:r>
+          </a:p>
+        </p:txBody>
+      </p:sp>
+      <p:sp>
+        <p:nvSpPr>
+          <p:cNvPr id="29" name="TextBox 28"/>
+          <p:cNvSpPr txBox="1"/>
+          <p:nvPr/>
+        </p:nvSpPr>
+        <p:spPr>
+          <a:xfrm>
+            <a:off x="495147" y="6035040"/>
+            <a:ext cx="1828800" cy="640080"/>
+          </a:xfrm>
+          <a:prstGeom prst="rect">
+            <a:avLst/>
+          </a:prstGeom>
+          <a:noFill/>
+        </p:spPr>
+        <p:txBody>
+          <a:bodyPr wrap="square" anchor="t" lIns="0" rIns="0" tIns="0" bIns="0">
+            <a:spAutoFit/>
+          </a:bodyPr>
+          <a:lstStyle/>
+          <a:p>
+            <a:pPr algn="ctr">
+              <a:lnSpc>
+                <a:spcPct val="112000"/>
+              </a:lnSpc>
+            </a:pPr>
+            <a:r>
+              <a:rPr sz="950" b="0">
+                <a:solidFill>
+                  <a:srgbClr val="515154"/>
+                </a:solidFill>
+                <a:latin typeface="PingFang SC"/>
+                <a:ea typeface="PingFang SC"/>
+                <a:cs typeface="PingFang SC"/>
+              </a:rPr>
+              <a:t>未添加模块</a:t>
+            </a:r>
+          </a:p>
+        </p:txBody>
+      </p:sp>
+      <p:sp>
+        <p:nvSpPr>
+          <p:cNvPr id="30" name="Oval 29"/>
+          <p:cNvSpPr/>
+          <p:nvPr/>
+        </p:nvSpPr>
+        <p:spPr>
+          <a:xfrm>
+            <a:off x="3046323" y="5468112"/>
+            <a:ext cx="475488" cy="475488"/>
+          </a:xfrm>
+          <a:prstGeom prst="ellipse">
+            <a:avLst/>
+          </a:prstGeom>
+          <a:solidFill>
+            <a:srgbClr val="9AA0A8"/>
+          </a:solidFill>
+          <a:ln>
+            <a:noFill/>
+          </a:ln>
+          <a:effectLst/>
+        </p:spPr>
+        <p:style>
+          <a:lnRef idx="1">
+            <a:schemeClr val="accent1"/>
+          </a:lnRef>
+          <a:fillRef idx="3">
+            <a:schemeClr val="accent1"/>
+          </a:fillRef>
+          <a:effectRef idx="2">
+            <a:schemeClr val="accent1"/>
+          </a:effectRef>
+          <a:fontRef idx="minor">
+            <a:schemeClr val="lt1"/>
+          </a:fontRef>
+        </p:style>
+        <p:txBody>
+          <a:bodyPr rtlCol="0" anchor="ctr" wrap="square" lIns="54864" rIns="54864" tIns="18288" bIns="18288"/>
+          <a:lstStyle/>
+          <a:p>
+            <a:pPr algn="ctr"/>
+            <a:r>
+              <a:rPr sz="1500" b="1">
+                <a:solidFill>
+                  <a:srgbClr val="FFFFFF"/>
+                </a:solidFill>
+                <a:latin typeface="PingFang SC"/>
+                <a:ea typeface="PingFang SC"/>
+                <a:cs typeface="PingFang SC"/>
+              </a:rPr>
+              <a:t>1</a:t>
+            </a:r>
+          </a:p>
+        </p:txBody>
+      </p:sp>
+      <p:sp>
+        <p:nvSpPr>
+          <p:cNvPr id="31" name="TextBox 30"/>
+          <p:cNvSpPr txBox="1"/>
+          <p:nvPr/>
+        </p:nvSpPr>
+        <p:spPr>
+          <a:xfrm>
+            <a:off x="2369667" y="6035040"/>
+            <a:ext cx="1828800" cy="640080"/>
+          </a:xfrm>
+          <a:prstGeom prst="rect">
+            <a:avLst/>
+          </a:prstGeom>
+          <a:noFill/>
+        </p:spPr>
+        <p:txBody>
+          <a:bodyPr wrap="square" anchor="t" lIns="0" rIns="0" tIns="0" bIns="0">
+            <a:spAutoFit/>
+          </a:bodyPr>
+          <a:lstStyle/>
+          <a:p>
+            <a:pPr algn="ctr">
+              <a:lnSpc>
+                <a:spcPct val="112000"/>
+              </a:lnSpc>
+            </a:pPr>
+            <a:r>
+              <a:rPr sz="950" b="0">
+                <a:solidFill>
+                  <a:srgbClr val="515154"/>
+                </a:solidFill>
+                <a:latin typeface="PingFang SC"/>
+                <a:ea typeface="PingFang SC"/>
+                <a:cs typeface="PingFang SC"/>
+              </a:rPr>
+              <a:t>仅有资质</a:t>
+            </a:r>
+          </a:p>
+        </p:txBody>
+      </p:sp>
+      <p:sp>
+        <p:nvSpPr>
+          <p:cNvPr id="32" name="Oval 31"/>
+          <p:cNvSpPr/>
+          <p:nvPr/>
+        </p:nvSpPr>
+        <p:spPr>
+          <a:xfrm>
+            <a:off x="4920843" y="5468112"/>
+            <a:ext cx="475488" cy="475488"/>
+          </a:xfrm>
+          <a:prstGeom prst="ellipse">
+            <a:avLst/>
+          </a:prstGeom>
+          <a:solidFill>
+            <a:srgbClr val="06A59A"/>
+          </a:solidFill>
+          <a:ln>
+            <a:noFill/>
+          </a:ln>
+          <a:effectLst/>
+        </p:spPr>
+        <p:style>
+          <a:lnRef idx="1">
+            <a:schemeClr val="accent1"/>
+          </a:lnRef>
+          <a:fillRef idx="3">
+            <a:schemeClr val="accent1"/>
+          </a:fillRef>
+          <a:effectRef idx="2">
+            <a:schemeClr val="accent1"/>
+          </a:effectRef>
+          <a:fontRef idx="minor">
+            <a:schemeClr val="lt1"/>
+          </a:fontRef>
+        </p:style>
+        <p:txBody>
+          <a:bodyPr rtlCol="0" anchor="ctr" wrap="square" lIns="54864" rIns="54864" tIns="18288" bIns="18288"/>
+          <a:lstStyle/>
+          <a:p>
+            <a:pPr algn="ctr"/>
+            <a:r>
+              <a:rPr sz="1500" b="1">
+                <a:solidFill>
+                  <a:srgbClr val="FFFFFF"/>
+                </a:solidFill>
+                <a:latin typeface="PingFang SC"/>
+                <a:ea typeface="PingFang SC"/>
+                <a:cs typeface="PingFang SC"/>
+              </a:rPr>
+              <a:t>2</a:t>
+            </a:r>
+          </a:p>
+        </p:txBody>
+      </p:sp>
+      <p:sp>
+        <p:nvSpPr>
+          <p:cNvPr id="33" name="TextBox 32"/>
+          <p:cNvSpPr txBox="1"/>
+          <p:nvPr/>
+        </p:nvSpPr>
+        <p:spPr>
+          <a:xfrm>
+            <a:off x="4244187" y="6035040"/>
+            <a:ext cx="1828800" cy="640080"/>
+          </a:xfrm>
+          <a:prstGeom prst="rect">
+            <a:avLst/>
+          </a:prstGeom>
+          <a:noFill/>
+        </p:spPr>
+        <p:txBody>
+          <a:bodyPr wrap="square" anchor="t" lIns="0" rIns="0" tIns="0" bIns="0">
+            <a:spAutoFit/>
+          </a:bodyPr>
+          <a:lstStyle/>
+          <a:p>
+            <a:pPr algn="ctr">
+              <a:lnSpc>
+                <a:spcPct val="112000"/>
+              </a:lnSpc>
+            </a:pPr>
+            <a:r>
+              <a:rPr sz="950" b="0">
+                <a:solidFill>
+                  <a:srgbClr val="515154"/>
+                </a:solidFill>
+                <a:latin typeface="PingFang SC"/>
+                <a:ea typeface="PingFang SC"/>
+                <a:cs typeface="PingFang SC"/>
+              </a:rPr>
+              <a:t>辅助操作 5 次以上</a:t>
+            </a:r>
+          </a:p>
+        </p:txBody>
+      </p:sp>
+      <p:sp>
+        <p:nvSpPr>
+          <p:cNvPr id="34" name="Oval 33"/>
+          <p:cNvSpPr/>
+          <p:nvPr/>
+        </p:nvSpPr>
+        <p:spPr>
+          <a:xfrm>
+            <a:off x="6795363" y="5468112"/>
+            <a:ext cx="475488" cy="475488"/>
+          </a:xfrm>
+          <a:prstGeom prst="ellipse">
+            <a:avLst/>
+          </a:prstGeom>
+          <a:solidFill>
+            <a:srgbClr val="3F93E6"/>
+          </a:solidFill>
+          <a:ln>
+            <a:noFill/>
+          </a:ln>
+          <a:effectLst/>
+        </p:spPr>
+        <p:style>
+          <a:lnRef idx="1">
+            <a:schemeClr val="accent1"/>
+          </a:lnRef>
+          <a:fillRef idx="3">
+            <a:schemeClr val="accent1"/>
+          </a:fillRef>
+          <a:effectRef idx="2">
+            <a:schemeClr val="accent1"/>
+          </a:effectRef>
+          <a:fontRef idx="minor">
+            <a:schemeClr val="lt1"/>
+          </a:fontRef>
+        </p:style>
+        <p:txBody>
+          <a:bodyPr rtlCol="0" anchor="ctr" wrap="square" lIns="54864" rIns="54864" tIns="18288" bIns="18288"/>
+          <a:lstStyle/>
+          <a:p>
+            <a:pPr algn="ctr"/>
+            <a:r>
+              <a:rPr sz="1500" b="1">
+                <a:solidFill>
+                  <a:srgbClr val="FFFFFF"/>
+                </a:solidFill>
+                <a:latin typeface="PingFang SC"/>
+                <a:ea typeface="PingFang SC"/>
+                <a:cs typeface="PingFang SC"/>
+              </a:rPr>
+              <a:t>3</a:t>
+            </a:r>
+          </a:p>
+        </p:txBody>
+      </p:sp>
+      <p:sp>
+        <p:nvSpPr>
+          <p:cNvPr id="35" name="TextBox 34"/>
+          <p:cNvSpPr txBox="1"/>
+          <p:nvPr/>
+        </p:nvSpPr>
+        <p:spPr>
+          <a:xfrm>
+            <a:off x="6118707" y="6035040"/>
+            <a:ext cx="1828800" cy="640080"/>
+          </a:xfrm>
+          <a:prstGeom prst="rect">
+            <a:avLst/>
+          </a:prstGeom>
+          <a:noFill/>
+        </p:spPr>
+        <p:txBody>
+          <a:bodyPr wrap="square" anchor="t" lIns="0" rIns="0" tIns="0" bIns="0">
+            <a:spAutoFit/>
+          </a:bodyPr>
+          <a:lstStyle/>
+          <a:p>
+            <a:pPr algn="ctr">
+              <a:lnSpc>
+                <a:spcPct val="112000"/>
+              </a:lnSpc>
+            </a:pPr>
+            <a:r>
+              <a:rPr sz="950" b="0">
+                <a:solidFill>
+                  <a:srgbClr val="515154"/>
+                </a:solidFill>
+                <a:latin typeface="PingFang SC"/>
+                <a:ea typeface="PingFang SC"/>
+                <a:cs typeface="PingFang SC"/>
+              </a:rPr>
+              <a:t>独立操作 5 次以上</a:t>
+            </a:r>
+          </a:p>
+        </p:txBody>
+      </p:sp>
+      <p:sp>
+        <p:nvSpPr>
+          <p:cNvPr id="36" name="Oval 35"/>
+          <p:cNvSpPr/>
+          <p:nvPr/>
+        </p:nvSpPr>
+        <p:spPr>
+          <a:xfrm>
+            <a:off x="8669883" y="5468112"/>
+            <a:ext cx="475488" cy="475488"/>
+          </a:xfrm>
+          <a:prstGeom prst="ellipse">
+            <a:avLst/>
+          </a:prstGeom>
+          <a:solidFill>
+            <a:srgbClr val="0071E3"/>
+          </a:solidFill>
+          <a:ln>
+            <a:noFill/>
+          </a:ln>
+          <a:effectLst/>
+        </p:spPr>
+        <p:style>
+          <a:lnRef idx="1">
+            <a:schemeClr val="accent1"/>
+          </a:lnRef>
+          <a:fillRef idx="3">
+            <a:schemeClr val="accent1"/>
+          </a:fillRef>
+          <a:effectRef idx="2">
+            <a:schemeClr val="accent1"/>
+          </a:effectRef>
+          <a:fontRef idx="minor">
+            <a:schemeClr val="lt1"/>
+          </a:fontRef>
+        </p:style>
+        <p:txBody>
+          <a:bodyPr rtlCol="0" anchor="ctr" wrap="square" lIns="54864" rIns="54864" tIns="18288" bIns="18288"/>
+          <a:lstStyle/>
+          <a:p>
+            <a:pPr algn="ctr"/>
+            <a:r>
+              <a:rPr sz="1500" b="1">
+                <a:solidFill>
+                  <a:srgbClr val="FFFFFF"/>
+                </a:solidFill>
+                <a:latin typeface="PingFang SC"/>
+                <a:ea typeface="PingFang SC"/>
+                <a:cs typeface="PingFang SC"/>
+              </a:rPr>
+              <a:t>4</a:t>
+            </a:r>
+          </a:p>
+        </p:txBody>
+      </p:sp>
+      <p:sp>
+        <p:nvSpPr>
+          <p:cNvPr id="37" name="TextBox 36"/>
+          <p:cNvSpPr txBox="1"/>
+          <p:nvPr/>
+        </p:nvSpPr>
+        <p:spPr>
+          <a:xfrm>
+            <a:off x="7993227" y="6035040"/>
+            <a:ext cx="1828800" cy="640080"/>
+          </a:xfrm>
+          <a:prstGeom prst="rect">
+            <a:avLst/>
+          </a:prstGeom>
+          <a:noFill/>
+        </p:spPr>
+        <p:txBody>
+          <a:bodyPr wrap="square" anchor="t" lIns="0" rIns="0" tIns="0" bIns="0">
+            <a:spAutoFit/>
+          </a:bodyPr>
+          <a:lstStyle/>
+          <a:p>
+            <a:pPr algn="ctr">
+              <a:lnSpc>
+                <a:spcPct val="112000"/>
+              </a:lnSpc>
+            </a:pPr>
+            <a:r>
+              <a:rPr sz="950" b="0">
+                <a:solidFill>
+                  <a:srgbClr val="515154"/>
+                </a:solidFill>
+                <a:latin typeface="PingFang SC"/>
+                <a:ea typeface="PingFang SC"/>
+                <a:cs typeface="PingFang SC"/>
+              </a:rPr>
+              <a:t>关键操作常作为 A 操作，可培训他人</a:t>
+            </a:r>
+          </a:p>
+        </p:txBody>
+      </p:sp>
+      <p:sp>
+        <p:nvSpPr>
+          <p:cNvPr id="38" name="Oval 37"/>
+          <p:cNvSpPr/>
+          <p:nvPr/>
+        </p:nvSpPr>
+        <p:spPr>
+          <a:xfrm>
+            <a:off x="10544403" y="5468112"/>
+            <a:ext cx="475488" cy="475488"/>
+          </a:xfrm>
+          <a:prstGeom prst="ellipse">
+            <a:avLst/>
+          </a:prstGeom>
+          <a:solidFill>
+            <a:srgbClr val="6B5BD1"/>
+          </a:solidFill>
+          <a:ln>
+            <a:noFill/>
+          </a:ln>
+          <a:effectLst/>
+        </p:spPr>
+        <p:style>
+          <a:lnRef idx="1">
+            <a:schemeClr val="accent1"/>
+          </a:lnRef>
+          <a:fillRef idx="3">
+            <a:schemeClr val="accent1"/>
+          </a:fillRef>
+          <a:effectRef idx="2">
+            <a:schemeClr val="accent1"/>
+          </a:effectRef>
+          <a:fontRef idx="minor">
+            <a:schemeClr val="lt1"/>
+          </a:fontRef>
+        </p:style>
+        <p:txBody>
+          <a:bodyPr rtlCol="0" anchor="ctr" wrap="square" lIns="54864" rIns="54864" tIns="18288" bIns="18288"/>
+          <a:lstStyle/>
+          <a:p>
+            <a:pPr algn="ctr"/>
+            <a:r>
+              <a:rPr sz="1500" b="1">
+                <a:solidFill>
+                  <a:srgbClr val="FFFFFF"/>
+                </a:solidFill>
+                <a:latin typeface="PingFang SC"/>
+                <a:ea typeface="PingFang SC"/>
+                <a:cs typeface="PingFang SC"/>
+              </a:rPr>
+              <a:t>5</a:t>
+            </a:r>
+          </a:p>
+        </p:txBody>
+      </p:sp>
+      <p:sp>
+        <p:nvSpPr>
+          <p:cNvPr id="39" name="TextBox 38"/>
+          <p:cNvSpPr txBox="1"/>
+          <p:nvPr/>
+        </p:nvSpPr>
+        <p:spPr>
+          <a:xfrm>
+            <a:off x="9867747" y="6035040"/>
+            <a:ext cx="1828800" cy="640080"/>
+          </a:xfrm>
+          <a:prstGeom prst="rect">
+            <a:avLst/>
+          </a:prstGeom>
+          <a:noFill/>
+        </p:spPr>
+        <p:txBody>
+          <a:bodyPr wrap="square" anchor="t" lIns="0" rIns="0" tIns="0" bIns="0">
+            <a:spAutoFit/>
+          </a:bodyPr>
+          <a:lstStyle/>
+          <a:p>
+            <a:pPr algn="ctr">
+              <a:lnSpc>
+                <a:spcPct val="112000"/>
+              </a:lnSpc>
+            </a:pPr>
+            <a:r>
+              <a:rPr sz="950" b="0">
+                <a:solidFill>
+                  <a:srgbClr val="515154"/>
+                </a:solidFill>
+                <a:latin typeface="PingFang SC"/>
+                <a:ea typeface="PingFang SC"/>
+                <a:cs typeface="PingFang SC"/>
+              </a:rPr>
+              <a:t>SME2.0 及以上，且满足 L4</a:t>
             </a:r>
           </a:p>
         </p:txBody>
@@ -13281,8 +13898,8 @@
         </p:nvSpPr>
         <p:spPr>
           <a:xfrm>
-            <a:off x="3383280" y="1828800"/>
-            <a:ext cx="1554480" cy="457200"/>
+            <a:off x="435711" y="1828800"/>
+            <a:ext cx="1225296" cy="457200"/>
           </a:xfrm>
           <a:prstGeom prst="roundRect">
             <a:avLst>
@@ -13314,12 +13931,12 @@
           </a:fontRef>
         </p:style>
         <p:txBody>
-          <a:bodyPr rtlCol="0" anchor="ctr" wrap="square" lIns="512064" rIns="54864" tIns="18288" bIns="18288"/>
+          <a:bodyPr rtlCol="0" anchor="ctr" wrap="square" lIns="402336" rIns="54864" tIns="18288" bIns="18288"/>
           <a:lstStyle/>
           <a:p>
             <a:pPr algn="l"/>
             <a:r>
-              <a:rPr sz="1100" b="1">
+              <a:rPr sz="1000" b="1">
                 <a:solidFill>
                   <a:srgbClr val="1D1D1F"/>
                 </a:solidFill>
@@ -13327,7 +13944,7 @@
                 <a:ea typeface="PingFang SC"/>
                 <a:cs typeface="PingFang SC"/>
               </a:rPr>
-              <a:t>限制条件 A</a:t>
+              <a:t>资质与等级</a:t>
             </a:r>
           </a:p>
         </p:txBody>
@@ -13340,8 +13957,8 @@
         </p:nvSpPr>
         <p:spPr>
           <a:xfrm>
-            <a:off x="3511296" y="1975104"/>
-            <a:ext cx="292608" cy="164592"/>
+            <a:off x="536295" y="1984248"/>
+            <a:ext cx="237744" cy="146304"/>
           </a:xfrm>
           <a:prstGeom prst="roundRect">
             <a:avLst>
@@ -13386,8 +14003,8 @@
         </p:nvSpPr>
         <p:spPr>
           <a:xfrm>
-            <a:off x="3657600" y="1993392"/>
-            <a:ext cx="128016" cy="128016"/>
+            <a:off x="655167" y="1997964"/>
+            <a:ext cx="118872" cy="118872"/>
           </a:xfrm>
           <a:prstGeom prst="ellipse">
             <a:avLst/>
@@ -13430,13 +14047,13 @@
         </p:nvCxnSpPr>
         <p:spPr>
           <a:xfrm>
-            <a:off x="4160520" y="2286000"/>
-            <a:ext cx="1938528" cy="594360"/>
+            <a:off x="1048359" y="2286000"/>
+            <a:ext cx="4575201" cy="640080"/>
           </a:xfrm>
           <a:prstGeom prst="line">
             <a:avLst/>
           </a:prstGeom>
-          <a:ln w="13970">
+          <a:ln w="11430">
             <a:solidFill>
               <a:srgbClr val="06A59A"/>
             </a:solidFill>
@@ -13467,8 +14084,8 @@
         </p:nvSpPr>
         <p:spPr>
           <a:xfrm>
-            <a:off x="5074920" y="1828800"/>
-            <a:ext cx="1554480" cy="457200"/>
+            <a:off x="1697583" y="1828800"/>
+            <a:ext cx="1225296" cy="457200"/>
           </a:xfrm>
           <a:prstGeom prst="roundRect">
             <a:avLst>
@@ -13500,12 +14117,12 @@
           </a:fontRef>
         </p:style>
         <p:txBody>
-          <a:bodyPr rtlCol="0" anchor="ctr" wrap="square" lIns="512064" rIns="54864" tIns="18288" bIns="18288"/>
+          <a:bodyPr rtlCol="0" anchor="ctr" wrap="square" lIns="402336" rIns="54864" tIns="18288" bIns="18288"/>
           <a:lstStyle/>
           <a:p>
             <a:pPr algn="l"/>
             <a:r>
-              <a:rPr sz="1100" b="1">
+              <a:rPr sz="1000" b="1">
                 <a:solidFill>
                   <a:srgbClr val="1D1D1F"/>
                 </a:solidFill>
@@ -13513,7 +14130,7 @@
                 <a:ea typeface="PingFang SC"/>
                 <a:cs typeface="PingFang SC"/>
               </a:rPr>
-              <a:t>限制条件 B</a:t>
+              <a:t>标准工时</a:t>
             </a:r>
           </a:p>
         </p:txBody>
@@ -13526,8 +14143,8 @@
         </p:nvSpPr>
         <p:spPr>
           <a:xfrm>
-            <a:off x="5202936" y="1975104"/>
-            <a:ext cx="292608" cy="164592"/>
+            <a:off x="1798167" y="1984248"/>
+            <a:ext cx="237744" cy="146304"/>
           </a:xfrm>
           <a:prstGeom prst="roundRect">
             <a:avLst>
@@ -13572,8 +14189,8 @@
         </p:nvSpPr>
         <p:spPr>
           <a:xfrm>
-            <a:off x="5349240" y="1993392"/>
-            <a:ext cx="128016" cy="128016"/>
+            <a:off x="1917039" y="1997964"/>
+            <a:ext cx="118872" cy="118872"/>
           </a:xfrm>
           <a:prstGeom prst="ellipse">
             <a:avLst/>
@@ -13616,13 +14233,13 @@
         </p:nvCxnSpPr>
         <p:spPr>
           <a:xfrm>
-            <a:off x="5852159" y="2286000"/>
-            <a:ext cx="246889" cy="594360"/>
+            <a:off x="2310231" y="2286000"/>
+            <a:ext cx="3313329" cy="640080"/>
           </a:xfrm>
           <a:prstGeom prst="line">
             <a:avLst/>
           </a:prstGeom>
-          <a:ln w="13970">
+          <a:ln w="11430">
             <a:solidFill>
               <a:srgbClr val="06A59A"/>
             </a:solidFill>
@@ -13653,8 +14270,8 @@
         </p:nvSpPr>
         <p:spPr>
           <a:xfrm>
-            <a:off x="6766560" y="1828800"/>
-            <a:ext cx="1554480" cy="457200"/>
+            <a:off x="2959455" y="1828800"/>
+            <a:ext cx="1225296" cy="457200"/>
           </a:xfrm>
           <a:prstGeom prst="roundRect">
             <a:avLst>
@@ -13686,12 +14303,12 @@
           </a:fontRef>
         </p:style>
         <p:txBody>
-          <a:bodyPr rtlCol="0" anchor="ctr" wrap="square" lIns="512064" rIns="54864" tIns="18288" bIns="18288"/>
+          <a:bodyPr rtlCol="0" anchor="ctr" wrap="square" lIns="402336" rIns="54864" tIns="18288" bIns="18288"/>
           <a:lstStyle/>
           <a:p>
             <a:pPr algn="l"/>
             <a:r>
-              <a:rPr sz="1100" b="1">
+              <a:rPr sz="1000" b="1">
                 <a:solidFill>
                   <a:srgbClr val="1D1D1F"/>
                 </a:solidFill>
@@ -13699,7 +14316,7 @@
                 <a:ea typeface="PingFang SC"/>
                 <a:cs typeface="PingFang SC"/>
               </a:rPr>
-              <a:t>限制条件 C</a:t>
+              <a:t>连续上班</a:t>
             </a:r>
           </a:p>
         </p:txBody>
@@ -13712,8 +14329,8 @@
         </p:nvSpPr>
         <p:spPr>
           <a:xfrm>
-            <a:off x="6894576" y="1975104"/>
-            <a:ext cx="292608" cy="164592"/>
+            <a:off x="3060039" y="1984248"/>
+            <a:ext cx="237744" cy="146304"/>
           </a:xfrm>
           <a:prstGeom prst="roundRect">
             <a:avLst>
@@ -13758,8 +14375,8 @@
         </p:nvSpPr>
         <p:spPr>
           <a:xfrm>
-            <a:off x="7040880" y="1993392"/>
-            <a:ext cx="128016" cy="128016"/>
+            <a:off x="3178911" y="1997964"/>
+            <a:ext cx="118872" cy="118872"/>
           </a:xfrm>
           <a:prstGeom prst="ellipse">
             <a:avLst/>
@@ -13801,14 +14418,14 @@
           <p:nvPr/>
         </p:nvCxnSpPr>
         <p:spPr>
-          <a:xfrm flipH="1">
-            <a:off x="6099048" y="2286000"/>
-            <a:ext cx="1444752" cy="594360"/>
+          <a:xfrm>
+            <a:off x="3572103" y="2286000"/>
+            <a:ext cx="2051457" cy="640080"/>
           </a:xfrm>
           <a:prstGeom prst="line">
             <a:avLst/>
           </a:prstGeom>
-          <a:ln w="13970">
+          <a:ln w="11430">
             <a:solidFill>
               <a:srgbClr val="06A59A"/>
             </a:solidFill>
@@ -13839,8 +14456,938 @@
         </p:nvSpPr>
         <p:spPr>
           <a:xfrm>
-            <a:off x="8458200" y="1828800"/>
-            <a:ext cx="1691640" cy="457200"/>
+            <a:off x="4221327" y="1828800"/>
+            <a:ext cx="1225296" cy="457200"/>
+          </a:xfrm>
+          <a:prstGeom prst="roundRect">
+            <a:avLst>
+              <a:gd name="adj" fmla="val 26000"/>
+            </a:avLst>
+          </a:prstGeom>
+          <a:solidFill>
+            <a:srgbClr val="F1FAF8"/>
+          </a:solidFill>
+          <a:ln w="12700">
+            <a:solidFill>
+              <a:srgbClr val="7FD0C6"/>
+            </a:solidFill>
+          </a:ln>
+          <a:effectLst/>
+        </p:spPr>
+        <p:style>
+          <a:lnRef idx="1">
+            <a:schemeClr val="accent1"/>
+          </a:lnRef>
+          <a:fillRef idx="3">
+            <a:schemeClr val="accent1"/>
+          </a:fillRef>
+          <a:effectRef idx="2">
+            <a:schemeClr val="accent1"/>
+          </a:effectRef>
+          <a:fontRef idx="minor">
+            <a:schemeClr val="lt1"/>
+          </a:fontRef>
+        </p:style>
+        <p:txBody>
+          <a:bodyPr rtlCol="0" anchor="ctr" wrap="square" lIns="402336" rIns="54864" tIns="18288" bIns="18288"/>
+          <a:lstStyle/>
+          <a:p>
+            <a:pPr algn="l"/>
+            <a:r>
+              <a:rPr sz="1000" b="1">
+                <a:solidFill>
+                  <a:srgbClr val="1D1D1F"/>
+                </a:solidFill>
+                <a:latin typeface="PingFang SC"/>
+                <a:ea typeface="PingFang SC"/>
+                <a:cs typeface="PingFang SC"/>
+              </a:rPr>
+              <a:t>夜班间隔</a:t>
+            </a:r>
+          </a:p>
+        </p:txBody>
+      </p:sp>
+      <p:sp>
+        <p:nvSpPr>
+          <p:cNvPr id="18" name="Rounded Rectangle 17"/>
+          <p:cNvSpPr/>
+          <p:nvPr/>
+        </p:nvSpPr>
+        <p:spPr>
+          <a:xfrm>
+            <a:off x="4321911" y="1984248"/>
+            <a:ext cx="237744" cy="146304"/>
+          </a:xfrm>
+          <a:prstGeom prst="roundRect">
+            <a:avLst>
+              <a:gd name="adj" fmla="val 50000"/>
+            </a:avLst>
+          </a:prstGeom>
+          <a:solidFill>
+            <a:srgbClr val="06A59A"/>
+          </a:solidFill>
+          <a:ln>
+            <a:noFill/>
+          </a:ln>
+          <a:effectLst/>
+        </p:spPr>
+        <p:style>
+          <a:lnRef idx="1">
+            <a:schemeClr val="accent1"/>
+          </a:lnRef>
+          <a:fillRef idx="3">
+            <a:schemeClr val="accent1"/>
+          </a:fillRef>
+          <a:effectRef idx="2">
+            <a:schemeClr val="accent1"/>
+          </a:effectRef>
+          <a:fontRef idx="minor">
+            <a:schemeClr val="lt1"/>
+          </a:fontRef>
+        </p:style>
+        <p:txBody>
+          <a:bodyPr rtlCol="0" anchor="ctr" wrap="square"/>
+          <a:lstStyle/>
+          <a:p>
+            <a:pPr algn="ctr"/>
+          </a:p>
+        </p:txBody>
+      </p:sp>
+      <p:sp>
+        <p:nvSpPr>
+          <p:cNvPr id="19" name="Oval 18"/>
+          <p:cNvSpPr/>
+          <p:nvPr/>
+        </p:nvSpPr>
+        <p:spPr>
+          <a:xfrm>
+            <a:off x="4440783" y="1997964"/>
+            <a:ext cx="118872" cy="118872"/>
+          </a:xfrm>
+          <a:prstGeom prst="ellipse">
+            <a:avLst/>
+          </a:prstGeom>
+          <a:solidFill>
+            <a:srgbClr val="FFFFFF"/>
+          </a:solidFill>
+          <a:ln>
+            <a:noFill/>
+          </a:ln>
+          <a:effectLst/>
+        </p:spPr>
+        <p:style>
+          <a:lnRef idx="1">
+            <a:schemeClr val="accent1"/>
+          </a:lnRef>
+          <a:fillRef idx="3">
+            <a:schemeClr val="accent1"/>
+          </a:fillRef>
+          <a:effectRef idx="2">
+            <a:schemeClr val="accent1"/>
+          </a:effectRef>
+          <a:fontRef idx="minor">
+            <a:schemeClr val="lt1"/>
+          </a:fontRef>
+        </p:style>
+        <p:txBody>
+          <a:bodyPr rtlCol="0" anchor="ctr"/>
+          <a:lstStyle/>
+          <a:p>
+            <a:pPr algn="ctr"/>
+          </a:p>
+        </p:txBody>
+      </p:sp>
+      <p:cxnSp>
+        <p:nvCxnSpPr>
+          <p:cNvPr id="20" name="Connector 19"/>
+          <p:cNvCxnSpPr/>
+          <p:nvPr/>
+        </p:nvCxnSpPr>
+        <p:spPr>
+          <a:xfrm>
+            <a:off x="4833975" y="2286000"/>
+            <a:ext cx="789585" cy="640080"/>
+          </a:xfrm>
+          <a:prstGeom prst="line">
+            <a:avLst/>
+          </a:prstGeom>
+          <a:ln w="11430">
+            <a:solidFill>
+              <a:srgbClr val="06A59A"/>
+            </a:solidFill>
+            <a:tailEnd type="triangle" w="med" len="med"/>
+          </a:ln>
+          <a:effectLst/>
+        </p:spPr>
+        <p:style>
+          <a:lnRef idx="2">
+            <a:schemeClr val="accent1"/>
+          </a:lnRef>
+          <a:fillRef idx="0">
+            <a:schemeClr val="accent1"/>
+          </a:fillRef>
+          <a:effectRef idx="1">
+            <a:schemeClr val="accent1"/>
+          </a:effectRef>
+          <a:fontRef idx="minor">
+            <a:schemeClr val="tx1"/>
+          </a:fontRef>
+        </p:style>
+      </p:cxnSp>
+      <p:sp>
+        <p:nvSpPr>
+          <p:cNvPr id="21" name="Rounded Rectangle 20"/>
+          <p:cNvSpPr/>
+          <p:nvPr/>
+        </p:nvSpPr>
+        <p:spPr>
+          <a:xfrm>
+            <a:off x="5483199" y="1828800"/>
+            <a:ext cx="1225296" cy="457200"/>
+          </a:xfrm>
+          <a:prstGeom prst="roundRect">
+            <a:avLst>
+              <a:gd name="adj" fmla="val 26000"/>
+            </a:avLst>
+          </a:prstGeom>
+          <a:solidFill>
+            <a:srgbClr val="F1FAF8"/>
+          </a:solidFill>
+          <a:ln w="12700">
+            <a:solidFill>
+              <a:srgbClr val="7FD0C6"/>
+            </a:solidFill>
+          </a:ln>
+          <a:effectLst/>
+        </p:spPr>
+        <p:style>
+          <a:lnRef idx="1">
+            <a:schemeClr val="accent1"/>
+          </a:lnRef>
+          <a:fillRef idx="3">
+            <a:schemeClr val="accent1"/>
+          </a:fillRef>
+          <a:effectRef idx="2">
+            <a:schemeClr val="accent1"/>
+          </a:effectRef>
+          <a:fontRef idx="minor">
+            <a:schemeClr val="lt1"/>
+          </a:fontRef>
+        </p:style>
+        <p:txBody>
+          <a:bodyPr rtlCol="0" anchor="ctr" wrap="square" lIns="402336" rIns="54864" tIns="18288" bIns="18288"/>
+          <a:lstStyle/>
+          <a:p>
+            <a:pPr algn="l"/>
+            <a:r>
+              <a:rPr sz="1000" b="1">
+                <a:solidFill>
+                  <a:srgbClr val="1D1D1F"/>
+                </a:solidFill>
+                <a:latin typeface="PingFang SC"/>
+                <a:ea typeface="PingFang SC"/>
+                <a:cs typeface="PingFang SC"/>
+              </a:rPr>
+              <a:t>班次需求</a:t>
+            </a:r>
+          </a:p>
+        </p:txBody>
+      </p:sp>
+      <p:sp>
+        <p:nvSpPr>
+          <p:cNvPr id="22" name="Rounded Rectangle 21"/>
+          <p:cNvSpPr/>
+          <p:nvPr/>
+        </p:nvSpPr>
+        <p:spPr>
+          <a:xfrm>
+            <a:off x="5583783" y="1984248"/>
+            <a:ext cx="237744" cy="146304"/>
+          </a:xfrm>
+          <a:prstGeom prst="roundRect">
+            <a:avLst>
+              <a:gd name="adj" fmla="val 50000"/>
+            </a:avLst>
+          </a:prstGeom>
+          <a:solidFill>
+            <a:srgbClr val="06A59A"/>
+          </a:solidFill>
+          <a:ln>
+            <a:noFill/>
+          </a:ln>
+          <a:effectLst/>
+        </p:spPr>
+        <p:style>
+          <a:lnRef idx="1">
+            <a:schemeClr val="accent1"/>
+          </a:lnRef>
+          <a:fillRef idx="3">
+            <a:schemeClr val="accent1"/>
+          </a:fillRef>
+          <a:effectRef idx="2">
+            <a:schemeClr val="accent1"/>
+          </a:effectRef>
+          <a:fontRef idx="minor">
+            <a:schemeClr val="lt1"/>
+          </a:fontRef>
+        </p:style>
+        <p:txBody>
+          <a:bodyPr rtlCol="0" anchor="ctr" wrap="square"/>
+          <a:lstStyle/>
+          <a:p>
+            <a:pPr algn="ctr"/>
+          </a:p>
+        </p:txBody>
+      </p:sp>
+      <p:sp>
+        <p:nvSpPr>
+          <p:cNvPr id="23" name="Oval 22"/>
+          <p:cNvSpPr/>
+          <p:nvPr/>
+        </p:nvSpPr>
+        <p:spPr>
+          <a:xfrm>
+            <a:off x="5702655" y="1997964"/>
+            <a:ext cx="118872" cy="118872"/>
+          </a:xfrm>
+          <a:prstGeom prst="ellipse">
+            <a:avLst/>
+          </a:prstGeom>
+          <a:solidFill>
+            <a:srgbClr val="FFFFFF"/>
+          </a:solidFill>
+          <a:ln>
+            <a:noFill/>
+          </a:ln>
+          <a:effectLst/>
+        </p:spPr>
+        <p:style>
+          <a:lnRef idx="1">
+            <a:schemeClr val="accent1"/>
+          </a:lnRef>
+          <a:fillRef idx="3">
+            <a:schemeClr val="accent1"/>
+          </a:fillRef>
+          <a:effectRef idx="2">
+            <a:schemeClr val="accent1"/>
+          </a:effectRef>
+          <a:fontRef idx="minor">
+            <a:schemeClr val="lt1"/>
+          </a:fontRef>
+        </p:style>
+        <p:txBody>
+          <a:bodyPr rtlCol="0" anchor="ctr"/>
+          <a:lstStyle/>
+          <a:p>
+            <a:pPr algn="ctr"/>
+          </a:p>
+        </p:txBody>
+      </p:sp>
+      <p:cxnSp>
+        <p:nvCxnSpPr>
+          <p:cNvPr id="24" name="Connector 23"/>
+          <p:cNvCxnSpPr/>
+          <p:nvPr/>
+        </p:nvCxnSpPr>
+        <p:spPr>
+          <a:xfrm flipH="1">
+            <a:off x="5623560" y="2286000"/>
+            <a:ext cx="472287" cy="640080"/>
+          </a:xfrm>
+          <a:prstGeom prst="line">
+            <a:avLst/>
+          </a:prstGeom>
+          <a:ln w="11430">
+            <a:solidFill>
+              <a:srgbClr val="06A59A"/>
+            </a:solidFill>
+            <a:tailEnd type="triangle" w="med" len="med"/>
+          </a:ln>
+          <a:effectLst/>
+        </p:spPr>
+        <p:style>
+          <a:lnRef idx="2">
+            <a:schemeClr val="accent1"/>
+          </a:lnRef>
+          <a:fillRef idx="0">
+            <a:schemeClr val="accent1"/>
+          </a:fillRef>
+          <a:effectRef idx="1">
+            <a:schemeClr val="accent1"/>
+          </a:effectRef>
+          <a:fontRef idx="minor">
+            <a:schemeClr val="tx1"/>
+          </a:fontRef>
+        </p:style>
+      </p:cxnSp>
+      <p:sp>
+        <p:nvSpPr>
+          <p:cNvPr id="25" name="Rounded Rectangle 24"/>
+          <p:cNvSpPr/>
+          <p:nvPr/>
+        </p:nvSpPr>
+        <p:spPr>
+          <a:xfrm>
+            <a:off x="6745071" y="1828800"/>
+            <a:ext cx="1225296" cy="457200"/>
+          </a:xfrm>
+          <a:prstGeom prst="roundRect">
+            <a:avLst>
+              <a:gd name="adj" fmla="val 26000"/>
+            </a:avLst>
+          </a:prstGeom>
+          <a:solidFill>
+            <a:srgbClr val="F1FAF8"/>
+          </a:solidFill>
+          <a:ln w="12700">
+            <a:solidFill>
+              <a:srgbClr val="7FD0C6"/>
+            </a:solidFill>
+          </a:ln>
+          <a:effectLst/>
+        </p:spPr>
+        <p:style>
+          <a:lnRef idx="1">
+            <a:schemeClr val="accent1"/>
+          </a:lnRef>
+          <a:fillRef idx="3">
+            <a:schemeClr val="accent1"/>
+          </a:fillRef>
+          <a:effectRef idx="2">
+            <a:schemeClr val="accent1"/>
+          </a:effectRef>
+          <a:fontRef idx="minor">
+            <a:schemeClr val="lt1"/>
+          </a:fontRef>
+        </p:style>
+        <p:txBody>
+          <a:bodyPr rtlCol="0" anchor="ctr" wrap="square" lIns="402336" rIns="54864" tIns="18288" bIns="18288"/>
+          <a:lstStyle/>
+          <a:p>
+            <a:pPr algn="l"/>
+            <a:r>
+              <a:rPr sz="1000" b="1">
+                <a:solidFill>
+                  <a:srgbClr val="1D1D1F"/>
+                </a:solidFill>
+                <a:latin typeface="PingFang SC"/>
+                <a:ea typeface="PingFang SC"/>
+                <a:cs typeface="PingFang SC"/>
+              </a:rPr>
+              <a:t>共享组互斥</a:t>
+            </a:r>
+          </a:p>
+        </p:txBody>
+      </p:sp>
+      <p:sp>
+        <p:nvSpPr>
+          <p:cNvPr id="26" name="Rounded Rectangle 25"/>
+          <p:cNvSpPr/>
+          <p:nvPr/>
+        </p:nvSpPr>
+        <p:spPr>
+          <a:xfrm>
+            <a:off x="6845655" y="1984248"/>
+            <a:ext cx="237744" cy="146304"/>
+          </a:xfrm>
+          <a:prstGeom prst="roundRect">
+            <a:avLst>
+              <a:gd name="adj" fmla="val 50000"/>
+            </a:avLst>
+          </a:prstGeom>
+          <a:solidFill>
+            <a:srgbClr val="06A59A"/>
+          </a:solidFill>
+          <a:ln>
+            <a:noFill/>
+          </a:ln>
+          <a:effectLst/>
+        </p:spPr>
+        <p:style>
+          <a:lnRef idx="1">
+            <a:schemeClr val="accent1"/>
+          </a:lnRef>
+          <a:fillRef idx="3">
+            <a:schemeClr val="accent1"/>
+          </a:fillRef>
+          <a:effectRef idx="2">
+            <a:schemeClr val="accent1"/>
+          </a:effectRef>
+          <a:fontRef idx="minor">
+            <a:schemeClr val="lt1"/>
+          </a:fontRef>
+        </p:style>
+        <p:txBody>
+          <a:bodyPr rtlCol="0" anchor="ctr" wrap="square"/>
+          <a:lstStyle/>
+          <a:p>
+            <a:pPr algn="ctr"/>
+          </a:p>
+        </p:txBody>
+      </p:sp>
+      <p:sp>
+        <p:nvSpPr>
+          <p:cNvPr id="27" name="Oval 26"/>
+          <p:cNvSpPr/>
+          <p:nvPr/>
+        </p:nvSpPr>
+        <p:spPr>
+          <a:xfrm>
+            <a:off x="6964527" y="1997964"/>
+            <a:ext cx="118872" cy="118872"/>
+          </a:xfrm>
+          <a:prstGeom prst="ellipse">
+            <a:avLst/>
+          </a:prstGeom>
+          <a:solidFill>
+            <a:srgbClr val="FFFFFF"/>
+          </a:solidFill>
+          <a:ln>
+            <a:noFill/>
+          </a:ln>
+          <a:effectLst/>
+        </p:spPr>
+        <p:style>
+          <a:lnRef idx="1">
+            <a:schemeClr val="accent1"/>
+          </a:lnRef>
+          <a:fillRef idx="3">
+            <a:schemeClr val="accent1"/>
+          </a:fillRef>
+          <a:effectRef idx="2">
+            <a:schemeClr val="accent1"/>
+          </a:effectRef>
+          <a:fontRef idx="minor">
+            <a:schemeClr val="lt1"/>
+          </a:fontRef>
+        </p:style>
+        <p:txBody>
+          <a:bodyPr rtlCol="0" anchor="ctr"/>
+          <a:lstStyle/>
+          <a:p>
+            <a:pPr algn="ctr"/>
+          </a:p>
+        </p:txBody>
+      </p:sp>
+      <p:cxnSp>
+        <p:nvCxnSpPr>
+          <p:cNvPr id="28" name="Connector 27"/>
+          <p:cNvCxnSpPr/>
+          <p:nvPr/>
+        </p:nvCxnSpPr>
+        <p:spPr>
+          <a:xfrm flipH="1">
+            <a:off x="5623560" y="2286000"/>
+            <a:ext cx="1734159" cy="640080"/>
+          </a:xfrm>
+          <a:prstGeom prst="line">
+            <a:avLst/>
+          </a:prstGeom>
+          <a:ln w="11430">
+            <a:solidFill>
+              <a:srgbClr val="06A59A"/>
+            </a:solidFill>
+            <a:tailEnd type="triangle" w="med" len="med"/>
+          </a:ln>
+          <a:effectLst/>
+        </p:spPr>
+        <p:style>
+          <a:lnRef idx="2">
+            <a:schemeClr val="accent1"/>
+          </a:lnRef>
+          <a:fillRef idx="0">
+            <a:schemeClr val="accent1"/>
+          </a:fillRef>
+          <a:effectRef idx="1">
+            <a:schemeClr val="accent1"/>
+          </a:effectRef>
+          <a:fontRef idx="minor">
+            <a:schemeClr val="tx1"/>
+          </a:fontRef>
+        </p:style>
+      </p:cxnSp>
+      <p:sp>
+        <p:nvSpPr>
+          <p:cNvPr id="29" name="Rounded Rectangle 28"/>
+          <p:cNvSpPr/>
+          <p:nvPr/>
+        </p:nvSpPr>
+        <p:spPr>
+          <a:xfrm>
+            <a:off x="8006943" y="1828800"/>
+            <a:ext cx="1225296" cy="457200"/>
+          </a:xfrm>
+          <a:prstGeom prst="roundRect">
+            <a:avLst>
+              <a:gd name="adj" fmla="val 26000"/>
+            </a:avLst>
+          </a:prstGeom>
+          <a:solidFill>
+            <a:srgbClr val="F1FAF8"/>
+          </a:solidFill>
+          <a:ln w="12700">
+            <a:solidFill>
+              <a:srgbClr val="7FD0C6"/>
+            </a:solidFill>
+          </a:ln>
+          <a:effectLst/>
+        </p:spPr>
+        <p:style>
+          <a:lnRef idx="1">
+            <a:schemeClr val="accent1"/>
+          </a:lnRef>
+          <a:fillRef idx="3">
+            <a:schemeClr val="accent1"/>
+          </a:fillRef>
+          <a:effectRef idx="2">
+            <a:schemeClr val="accent1"/>
+          </a:effectRef>
+          <a:fontRef idx="minor">
+            <a:schemeClr val="lt1"/>
+          </a:fontRef>
+        </p:style>
+        <p:txBody>
+          <a:bodyPr rtlCol="0" anchor="ctr" wrap="square" lIns="402336" rIns="54864" tIns="18288" bIns="18288"/>
+          <a:lstStyle/>
+          <a:p>
+            <a:pPr algn="l"/>
+            <a:r>
+              <a:rPr sz="1000" b="1">
+                <a:solidFill>
+                  <a:srgbClr val="1D1D1F"/>
+                </a:solidFill>
+                <a:latin typeface="PingFang SC"/>
+                <a:ea typeface="PingFang SC"/>
+                <a:cs typeface="PingFang SC"/>
+              </a:rPr>
+              <a:t>领导层在岗</a:t>
+            </a:r>
+          </a:p>
+        </p:txBody>
+      </p:sp>
+      <p:sp>
+        <p:nvSpPr>
+          <p:cNvPr id="30" name="Rounded Rectangle 29"/>
+          <p:cNvSpPr/>
+          <p:nvPr/>
+        </p:nvSpPr>
+        <p:spPr>
+          <a:xfrm>
+            <a:off x="8107527" y="1984248"/>
+            <a:ext cx="237744" cy="146304"/>
+          </a:xfrm>
+          <a:prstGeom prst="roundRect">
+            <a:avLst>
+              <a:gd name="adj" fmla="val 50000"/>
+            </a:avLst>
+          </a:prstGeom>
+          <a:solidFill>
+            <a:srgbClr val="06A59A"/>
+          </a:solidFill>
+          <a:ln>
+            <a:noFill/>
+          </a:ln>
+          <a:effectLst/>
+        </p:spPr>
+        <p:style>
+          <a:lnRef idx="1">
+            <a:schemeClr val="accent1"/>
+          </a:lnRef>
+          <a:fillRef idx="3">
+            <a:schemeClr val="accent1"/>
+          </a:fillRef>
+          <a:effectRef idx="2">
+            <a:schemeClr val="accent1"/>
+          </a:effectRef>
+          <a:fontRef idx="minor">
+            <a:schemeClr val="lt1"/>
+          </a:fontRef>
+        </p:style>
+        <p:txBody>
+          <a:bodyPr rtlCol="0" anchor="ctr" wrap="square"/>
+          <a:lstStyle/>
+          <a:p>
+            <a:pPr algn="ctr"/>
+          </a:p>
+        </p:txBody>
+      </p:sp>
+      <p:sp>
+        <p:nvSpPr>
+          <p:cNvPr id="31" name="Oval 30"/>
+          <p:cNvSpPr/>
+          <p:nvPr/>
+        </p:nvSpPr>
+        <p:spPr>
+          <a:xfrm>
+            <a:off x="8226399" y="1997964"/>
+            <a:ext cx="118872" cy="118872"/>
+          </a:xfrm>
+          <a:prstGeom prst="ellipse">
+            <a:avLst/>
+          </a:prstGeom>
+          <a:solidFill>
+            <a:srgbClr val="FFFFFF"/>
+          </a:solidFill>
+          <a:ln>
+            <a:noFill/>
+          </a:ln>
+          <a:effectLst/>
+        </p:spPr>
+        <p:style>
+          <a:lnRef idx="1">
+            <a:schemeClr val="accent1"/>
+          </a:lnRef>
+          <a:fillRef idx="3">
+            <a:schemeClr val="accent1"/>
+          </a:fillRef>
+          <a:effectRef idx="2">
+            <a:schemeClr val="accent1"/>
+          </a:effectRef>
+          <a:fontRef idx="minor">
+            <a:schemeClr val="lt1"/>
+          </a:fontRef>
+        </p:style>
+        <p:txBody>
+          <a:bodyPr rtlCol="0" anchor="ctr"/>
+          <a:lstStyle/>
+          <a:p>
+            <a:pPr algn="ctr"/>
+          </a:p>
+        </p:txBody>
+      </p:sp>
+      <p:cxnSp>
+        <p:nvCxnSpPr>
+          <p:cNvPr id="32" name="Connector 31"/>
+          <p:cNvCxnSpPr/>
+          <p:nvPr/>
+        </p:nvCxnSpPr>
+        <p:spPr>
+          <a:xfrm flipH="1">
+            <a:off x="5623560" y="2286000"/>
+            <a:ext cx="2996031" cy="640080"/>
+          </a:xfrm>
+          <a:prstGeom prst="line">
+            <a:avLst/>
+          </a:prstGeom>
+          <a:ln w="11430">
+            <a:solidFill>
+              <a:srgbClr val="06A59A"/>
+            </a:solidFill>
+            <a:tailEnd type="triangle" w="med" len="med"/>
+          </a:ln>
+          <a:effectLst/>
+        </p:spPr>
+        <p:style>
+          <a:lnRef idx="2">
+            <a:schemeClr val="accent1"/>
+          </a:lnRef>
+          <a:fillRef idx="0">
+            <a:schemeClr val="accent1"/>
+          </a:fillRef>
+          <a:effectRef idx="1">
+            <a:schemeClr val="accent1"/>
+          </a:effectRef>
+          <a:fontRef idx="minor">
+            <a:schemeClr val="tx1"/>
+          </a:fontRef>
+        </p:style>
+      </p:cxnSp>
+      <p:sp>
+        <p:nvSpPr>
+          <p:cNvPr id="33" name="Rounded Rectangle 32"/>
+          <p:cNvSpPr/>
+          <p:nvPr/>
+        </p:nvSpPr>
+        <p:spPr>
+          <a:xfrm>
+            <a:off x="9268815" y="1828800"/>
+            <a:ext cx="1225296" cy="457200"/>
+          </a:xfrm>
+          <a:prstGeom prst="roundRect">
+            <a:avLst>
+              <a:gd name="adj" fmla="val 26000"/>
+            </a:avLst>
+          </a:prstGeom>
+          <a:solidFill>
+            <a:srgbClr val="F1FAF8"/>
+          </a:solidFill>
+          <a:ln w="12700">
+            <a:solidFill>
+              <a:srgbClr val="7FD0C6"/>
+            </a:solidFill>
+          </a:ln>
+          <a:effectLst/>
+        </p:spPr>
+        <p:style>
+          <a:lnRef idx="1">
+            <a:schemeClr val="accent1"/>
+          </a:lnRef>
+          <a:fillRef idx="3">
+            <a:schemeClr val="accent1"/>
+          </a:fillRef>
+          <a:effectRef idx="2">
+            <a:schemeClr val="accent1"/>
+          </a:effectRef>
+          <a:fontRef idx="minor">
+            <a:schemeClr val="lt1"/>
+          </a:fontRef>
+        </p:style>
+        <p:txBody>
+          <a:bodyPr rtlCol="0" anchor="ctr" wrap="square" lIns="402336" rIns="54864" tIns="18288" bIns="18288"/>
+          <a:lstStyle/>
+          <a:p>
+            <a:pPr algn="l"/>
+            <a:r>
+              <a:rPr sz="1000" b="1">
+                <a:solidFill>
+                  <a:srgbClr val="1D1D1F"/>
+                </a:solidFill>
+                <a:latin typeface="PingFang SC"/>
+                <a:ea typeface="PingFang SC"/>
+                <a:cs typeface="PingFang SC"/>
+              </a:rPr>
+              <a:t>锁定保护</a:t>
+            </a:r>
+          </a:p>
+        </p:txBody>
+      </p:sp>
+      <p:sp>
+        <p:nvSpPr>
+          <p:cNvPr id="34" name="Rounded Rectangle 33"/>
+          <p:cNvSpPr/>
+          <p:nvPr/>
+        </p:nvSpPr>
+        <p:spPr>
+          <a:xfrm>
+            <a:off x="9369399" y="1984248"/>
+            <a:ext cx="237744" cy="146304"/>
+          </a:xfrm>
+          <a:prstGeom prst="roundRect">
+            <a:avLst>
+              <a:gd name="adj" fmla="val 50000"/>
+            </a:avLst>
+          </a:prstGeom>
+          <a:solidFill>
+            <a:srgbClr val="06A59A"/>
+          </a:solidFill>
+          <a:ln>
+            <a:noFill/>
+          </a:ln>
+          <a:effectLst/>
+        </p:spPr>
+        <p:style>
+          <a:lnRef idx="1">
+            <a:schemeClr val="accent1"/>
+          </a:lnRef>
+          <a:fillRef idx="3">
+            <a:schemeClr val="accent1"/>
+          </a:fillRef>
+          <a:effectRef idx="2">
+            <a:schemeClr val="accent1"/>
+          </a:effectRef>
+          <a:fontRef idx="minor">
+            <a:schemeClr val="lt1"/>
+          </a:fontRef>
+        </p:style>
+        <p:txBody>
+          <a:bodyPr rtlCol="0" anchor="ctr" wrap="square"/>
+          <a:lstStyle/>
+          <a:p>
+            <a:pPr algn="ctr"/>
+          </a:p>
+        </p:txBody>
+      </p:sp>
+      <p:sp>
+        <p:nvSpPr>
+          <p:cNvPr id="35" name="Oval 34"/>
+          <p:cNvSpPr/>
+          <p:nvPr/>
+        </p:nvSpPr>
+        <p:spPr>
+          <a:xfrm>
+            <a:off x="9488271" y="1997964"/>
+            <a:ext cx="118872" cy="118872"/>
+          </a:xfrm>
+          <a:prstGeom prst="ellipse">
+            <a:avLst/>
+          </a:prstGeom>
+          <a:solidFill>
+            <a:srgbClr val="FFFFFF"/>
+          </a:solidFill>
+          <a:ln>
+            <a:noFill/>
+          </a:ln>
+          <a:effectLst/>
+        </p:spPr>
+        <p:style>
+          <a:lnRef idx="1">
+            <a:schemeClr val="accent1"/>
+          </a:lnRef>
+          <a:fillRef idx="3">
+            <a:schemeClr val="accent1"/>
+          </a:fillRef>
+          <a:effectRef idx="2">
+            <a:schemeClr val="accent1"/>
+          </a:effectRef>
+          <a:fontRef idx="minor">
+            <a:schemeClr val="lt1"/>
+          </a:fontRef>
+        </p:style>
+        <p:txBody>
+          <a:bodyPr rtlCol="0" anchor="ctr"/>
+          <a:lstStyle/>
+          <a:p>
+            <a:pPr algn="ctr"/>
+          </a:p>
+        </p:txBody>
+      </p:sp>
+      <p:cxnSp>
+        <p:nvCxnSpPr>
+          <p:cNvPr id="36" name="Connector 35"/>
+          <p:cNvCxnSpPr/>
+          <p:nvPr/>
+        </p:nvCxnSpPr>
+        <p:spPr>
+          <a:xfrm flipH="1">
+            <a:off x="5623560" y="2286000"/>
+            <a:ext cx="4257903" cy="640080"/>
+          </a:xfrm>
+          <a:prstGeom prst="line">
+            <a:avLst/>
+          </a:prstGeom>
+          <a:ln w="11430">
+            <a:solidFill>
+              <a:srgbClr val="06A59A"/>
+            </a:solidFill>
+            <a:tailEnd type="triangle" w="med" len="med"/>
+          </a:ln>
+          <a:effectLst/>
+        </p:spPr>
+        <p:style>
+          <a:lnRef idx="2">
+            <a:schemeClr val="accent1"/>
+          </a:lnRef>
+          <a:fillRef idx="0">
+            <a:schemeClr val="accent1"/>
+          </a:fillRef>
+          <a:effectRef idx="1">
+            <a:schemeClr val="accent1"/>
+          </a:effectRef>
+          <a:fontRef idx="minor">
+            <a:schemeClr val="tx1"/>
+          </a:fontRef>
+        </p:style>
+      </p:cxnSp>
+      <p:sp>
+        <p:nvSpPr>
+          <p:cNvPr id="37" name="Rounded Rectangle 36"/>
+          <p:cNvSpPr/>
+          <p:nvPr/>
+        </p:nvSpPr>
+        <p:spPr>
+          <a:xfrm>
+            <a:off x="10530687" y="1828800"/>
+            <a:ext cx="1225296" cy="457200"/>
           </a:xfrm>
           <a:prstGeom prst="roundRect">
             <a:avLst>
@@ -13878,7 +15425,7 @@
           <a:p>
             <a:pPr algn="ctr"/>
             <a:r>
-              <a:rPr sz="1050" b="1">
+              <a:rPr sz="1100" b="1">
                 <a:solidFill>
                   <a:srgbClr val="0071E3"/>
                 </a:solidFill>
@@ -13886,26 +15433,26 @@
                 <a:ea typeface="PingFang SC"/>
                 <a:cs typeface="PingFang SC"/>
               </a:rPr>
-              <a:t>+ 自定义限制条件</a:t>
+              <a:t>+ 自定义</a:t>
             </a:r>
           </a:p>
         </p:txBody>
       </p:sp>
       <p:cxnSp>
         <p:nvCxnSpPr>
-          <p:cNvPr id="18" name="Connector 17"/>
+          <p:cNvPr id="38" name="Connector 37"/>
           <p:cNvCxnSpPr/>
           <p:nvPr/>
         </p:nvCxnSpPr>
         <p:spPr>
           <a:xfrm flipH="1">
-            <a:off x="6309360" y="2286000"/>
-            <a:ext cx="2560320" cy="594360"/>
+            <a:off x="5623560" y="2286000"/>
+            <a:ext cx="5519775" cy="640080"/>
           </a:xfrm>
           <a:prstGeom prst="line">
             <a:avLst/>
           </a:prstGeom>
-          <a:ln w="13970">
+          <a:ln w="11430">
             <a:solidFill>
               <a:srgbClr val="06A59A"/>
             </a:solidFill>
@@ -13930,7 +15477,7 @@
       </p:cxnSp>
       <p:sp>
         <p:nvSpPr>
-          <p:cNvPr id="19" name="Rounded Rectangle 18"/>
+          <p:cNvPr id="39" name="Rounded Rectangle 38"/>
           <p:cNvSpPr/>
           <p:nvPr/>
         </p:nvSpPr>
@@ -14001,7 +15548,7 @@
       </p:sp>
       <p:sp>
         <p:nvSpPr>
-          <p:cNvPr id="20" name="TextBox 19"/>
+          <p:cNvPr id="40" name="TextBox 39"/>
           <p:cNvSpPr txBox="1"/>
           <p:nvPr/>
         </p:nvSpPr>
@@ -14042,7 +15589,7 @@
       </p:sp>
       <p:cxnSp>
         <p:nvCxnSpPr>
-          <p:cNvPr id="21" name="Connector 20"/>
+          <p:cNvPr id="41" name="Connector 40"/>
           <p:cNvCxnSpPr/>
           <p:nvPr/>
         </p:nvCxnSpPr>
@@ -14079,7 +15626,7 @@
       </p:cxnSp>
       <p:sp>
         <p:nvSpPr>
-          <p:cNvPr id="22" name="Rounded Rectangle 21"/>
+          <p:cNvPr id="42" name="Rounded Rectangle 41"/>
           <p:cNvSpPr/>
           <p:nvPr/>
         </p:nvSpPr>
@@ -14148,7 +15695,7 @@
       </p:sp>
       <p:sp>
         <p:nvSpPr>
-          <p:cNvPr id="23" name="TextBox 22"/>
+          <p:cNvPr id="43" name="TextBox 42"/>
           <p:cNvSpPr txBox="1"/>
           <p:nvPr/>
         </p:nvSpPr>
@@ -14189,7 +15736,7 @@
       </p:sp>
       <p:cxnSp>
         <p:nvCxnSpPr>
-          <p:cNvPr id="24" name="Connector 23"/>
+          <p:cNvPr id="44" name="Connector 43"/>
           <p:cNvCxnSpPr/>
           <p:nvPr/>
         </p:nvCxnSpPr>
@@ -14226,7 +15773,7 @@
       </p:cxnSp>
       <p:sp>
         <p:nvSpPr>
-          <p:cNvPr id="25" name="Rounded Rectangle 24"/>
+          <p:cNvPr id="45" name="Rounded Rectangle 44"/>
           <p:cNvSpPr/>
           <p:nvPr/>
         </p:nvSpPr>
@@ -14265,7 +15812,7 @@
           </a:fontRef>
         </p:style>
         <p:txBody>
-          <a:bodyPr rtlCol="0" anchor="t" wrap="square" lIns="54864" rIns="54864" tIns="18288" bIns="18288"/>
+          <a:bodyPr rtlCol="0" anchor="t" wrap="square" lIns="164592" rIns="54864" tIns="18288" bIns="18288"/>
           <a:lstStyle/>
           <a:p>
             <a:pPr algn="l"/>
@@ -14285,7 +15832,7 @@
       </p:sp>
       <p:sp>
         <p:nvSpPr>
-          <p:cNvPr id="26" name="Rounded Rectangle 25"/>
+          <p:cNvPr id="46" name="Rounded Rectangle 45"/>
           <p:cNvSpPr/>
           <p:nvPr/>
         </p:nvSpPr>
@@ -14331,7 +15878,7 @@
       </p:sp>
       <p:sp>
         <p:nvSpPr>
-          <p:cNvPr id="27" name="Rounded Rectangle 26"/>
+          <p:cNvPr id="47" name="Rounded Rectangle 46"/>
           <p:cNvSpPr/>
           <p:nvPr/>
         </p:nvSpPr>
@@ -14377,7 +15924,7 @@
       </p:sp>
       <p:sp>
         <p:nvSpPr>
-          <p:cNvPr id="28" name="Rounded Rectangle 27"/>
+          <p:cNvPr id="48" name="Rounded Rectangle 47"/>
           <p:cNvSpPr/>
           <p:nvPr/>
         </p:nvSpPr>
@@ -14423,7 +15970,7 @@
       </p:sp>
       <p:sp>
         <p:nvSpPr>
-          <p:cNvPr id="29" name="Rounded Rectangle 28"/>
+          <p:cNvPr id="49" name="Rounded Rectangle 48"/>
           <p:cNvSpPr/>
           <p:nvPr/>
         </p:nvSpPr>
@@ -14469,7 +16016,7 @@
       </p:sp>
       <p:sp>
         <p:nvSpPr>
-          <p:cNvPr id="30" name="Rounded Rectangle 29"/>
+          <p:cNvPr id="50" name="Rounded Rectangle 49"/>
           <p:cNvSpPr/>
           <p:nvPr/>
         </p:nvSpPr>
@@ -14515,7 +16062,7 @@
       </p:sp>
       <p:sp>
         <p:nvSpPr>
-          <p:cNvPr id="31" name="Rounded Rectangle 30"/>
+          <p:cNvPr id="51" name="Rounded Rectangle 50"/>
           <p:cNvSpPr/>
           <p:nvPr/>
         </p:nvSpPr>
@@ -14561,7 +16108,7 @@
       </p:sp>
       <p:sp>
         <p:nvSpPr>
-          <p:cNvPr id="32" name="Rounded Rectangle 31"/>
+          <p:cNvPr id="52" name="Rounded Rectangle 51"/>
           <p:cNvSpPr/>
           <p:nvPr/>
         </p:nvSpPr>
@@ -14607,7 +16154,7 @@
       </p:sp>
       <p:sp>
         <p:nvSpPr>
-          <p:cNvPr id="33" name="Rounded Rectangle 32"/>
+          <p:cNvPr id="53" name="Rounded Rectangle 52"/>
           <p:cNvSpPr/>
           <p:nvPr/>
         </p:nvSpPr>
@@ -14653,7 +16200,7 @@
       </p:sp>
       <p:sp>
         <p:nvSpPr>
-          <p:cNvPr id="34" name="Rounded Rectangle 33"/>
+          <p:cNvPr id="54" name="Rounded Rectangle 53"/>
           <p:cNvSpPr/>
           <p:nvPr/>
         </p:nvSpPr>
@@ -14699,7 +16246,7 @@
       </p:sp>
       <p:sp>
         <p:nvSpPr>
-          <p:cNvPr id="35" name="Rounded Rectangle 34"/>
+          <p:cNvPr id="55" name="Rounded Rectangle 54"/>
           <p:cNvSpPr/>
           <p:nvPr/>
         </p:nvSpPr>
@@ -14745,7 +16292,7 @@
       </p:sp>
       <p:sp>
         <p:nvSpPr>
-          <p:cNvPr id="36" name="Rounded Rectangle 35"/>
+          <p:cNvPr id="56" name="Rounded Rectangle 55"/>
           <p:cNvSpPr/>
           <p:nvPr/>
         </p:nvSpPr>
@@ -14791,7 +16338,7 @@
       </p:sp>
       <p:sp>
         <p:nvSpPr>
-          <p:cNvPr id="37" name="Rounded Rectangle 36"/>
+          <p:cNvPr id="57" name="Rounded Rectangle 56"/>
           <p:cNvSpPr/>
           <p:nvPr/>
         </p:nvSpPr>
@@ -14837,7 +16384,7 @@
       </p:sp>
       <p:sp>
         <p:nvSpPr>
-          <p:cNvPr id="38" name="Rounded Rectangle 37"/>
+          <p:cNvPr id="58" name="Rounded Rectangle 57"/>
           <p:cNvSpPr/>
           <p:nvPr/>
         </p:nvSpPr>
@@ -14883,7 +16430,7 @@
       </p:sp>
       <p:sp>
         <p:nvSpPr>
-          <p:cNvPr id="39" name="Rounded Rectangle 38"/>
+          <p:cNvPr id="59" name="Rounded Rectangle 58"/>
           <p:cNvSpPr/>
           <p:nvPr/>
         </p:nvSpPr>
@@ -14929,7 +16476,7 @@
       </p:sp>
       <p:sp>
         <p:nvSpPr>
-          <p:cNvPr id="40" name="Rounded Rectangle 39"/>
+          <p:cNvPr id="60" name="Rounded Rectangle 59"/>
           <p:cNvSpPr/>
           <p:nvPr/>
         </p:nvSpPr>
@@ -14975,7 +16522,7 @@
       </p:sp>
       <p:sp>
         <p:nvSpPr>
-          <p:cNvPr id="41" name="Rounded Rectangle 40"/>
+          <p:cNvPr id="61" name="Rounded Rectangle 60"/>
           <p:cNvSpPr/>
           <p:nvPr/>
         </p:nvSpPr>
@@ -15021,7 +16568,7 @@
       </p:sp>
       <p:sp>
         <p:nvSpPr>
-          <p:cNvPr id="42" name="Rounded Rectangle 41"/>
+          <p:cNvPr id="62" name="Rounded Rectangle 61"/>
           <p:cNvSpPr/>
           <p:nvPr/>
         </p:nvSpPr>
@@ -15067,7 +16614,7 @@
       </p:sp>
       <p:sp>
         <p:nvSpPr>
-          <p:cNvPr id="43" name="Rounded Rectangle 42"/>
+          <p:cNvPr id="63" name="Rounded Rectangle 62"/>
           <p:cNvSpPr/>
           <p:nvPr/>
         </p:nvSpPr>
@@ -15113,7 +16660,7 @@
       </p:sp>
       <p:sp>
         <p:nvSpPr>
-          <p:cNvPr id="44" name="Rounded Rectangle 43"/>
+          <p:cNvPr id="64" name="Rounded Rectangle 63"/>
           <p:cNvSpPr/>
           <p:nvPr/>
         </p:nvSpPr>
@@ -15159,7 +16706,7 @@
       </p:sp>
       <p:sp>
         <p:nvSpPr>
-          <p:cNvPr id="45" name="Rounded Rectangle 44"/>
+          <p:cNvPr id="65" name="Rounded Rectangle 64"/>
           <p:cNvSpPr/>
           <p:nvPr/>
         </p:nvSpPr>
@@ -15205,7 +16752,7 @@
       </p:sp>
       <p:sp>
         <p:nvSpPr>
-          <p:cNvPr id="46" name="Rounded Rectangle 45"/>
+          <p:cNvPr id="66" name="Rounded Rectangle 65"/>
           <p:cNvSpPr/>
           <p:nvPr/>
         </p:nvSpPr>
@@ -15251,7 +16798,7 @@
       </p:sp>
       <p:sp>
         <p:nvSpPr>
-          <p:cNvPr id="47" name="Rounded Rectangle 46"/>
+          <p:cNvPr id="67" name="Rounded Rectangle 66"/>
           <p:cNvSpPr/>
           <p:nvPr/>
         </p:nvSpPr>
@@ -15297,7 +16844,7 @@
       </p:sp>
       <p:sp>
         <p:nvSpPr>
-          <p:cNvPr id="48" name="Rounded Rectangle 47"/>
+          <p:cNvPr id="68" name="Rounded Rectangle 67"/>
           <p:cNvSpPr/>
           <p:nvPr/>
         </p:nvSpPr>
@@ -15343,7 +16890,7 @@
       </p:sp>
       <p:sp>
         <p:nvSpPr>
-          <p:cNvPr id="49" name="Rounded Rectangle 48"/>
+          <p:cNvPr id="69" name="Rounded Rectangle 68"/>
           <p:cNvSpPr/>
           <p:nvPr/>
         </p:nvSpPr>
@@ -15531,7 +17078,7 @@
         <p:spPr>
           <a:xfrm>
             <a:off x="731519" y="1645920"/>
-            <a:ext cx="5760720" cy="3844986"/>
+            <a:ext cx="5760720" cy="4699754"/>
           </a:xfrm>
           <a:prstGeom prst="roundRect">
             <a:avLst>
@@ -15587,7 +17134,7 @@
         <p:spPr>
           <a:xfrm>
             <a:off x="777240" y="1691640"/>
-            <a:ext cx="5669280" cy="3753546"/>
+            <a:ext cx="5669280" cy="4608314"/>
           </a:xfrm>
           <a:prstGeom prst="rect">
             <a:avLst/>

--- a/docs/highlights_deck/paichan_editable.pptx
+++ b/docs/highlights_deck/paichan_editable.pptx
@@ -3708,20 +3708,20 @@
         </p:nvSpPr>
         <p:spPr>
           <a:xfrm>
-            <a:off x="640080" y="3703320"/>
-            <a:ext cx="5029200" cy="402336"/>
+            <a:off x="640080" y="3520440"/>
+            <a:ext cx="1417320" cy="384048"/>
           </a:xfrm>
           <a:prstGeom prst="roundRect">
             <a:avLst>
-              <a:gd name="adj" fmla="val 22000"/>
+              <a:gd name="adj" fmla="val 50000"/>
             </a:avLst>
           </a:prstGeom>
           <a:solidFill>
             <a:srgbClr val="FFFFFF"/>
           </a:solidFill>
-          <a:ln w="12700">
+          <a:ln w="19050">
             <a:solidFill>
-              <a:srgbClr val="D8DBE0"/>
+              <a:srgbClr val="0071E3"/>
             </a:solidFill>
           </a:ln>
           <a:effectLst/>
@@ -3741,78 +3741,226 @@
           </a:fontRef>
         </p:style>
         <p:txBody>
-          <a:bodyPr rtlCol="0" anchor="ctr" wrap="square" lIns="164592" rIns="54864" tIns="18288" bIns="18288"/>
-          <a:lstStyle/>
-          <a:p>
-            <a:pPr algn="l"/>
-            <a:r>
-              <a:rPr sz="1300" b="1">
-                <a:solidFill>
-                  <a:srgbClr val="1D1D1F"/>
+          <a:bodyPr rtlCol="0" anchor="ctr" wrap="square" lIns="54864" rIns="54864" tIns="18288" bIns="18288"/>
+          <a:lstStyle/>
+          <a:p>
+            <a:pPr algn="ctr"/>
+            <a:r>
+              <a:rPr sz="1200" b="1">
+                <a:solidFill>
+                  <a:srgbClr val="0071E3"/>
                 </a:solidFill>
                 <a:latin typeface="PingFang SC"/>
                 <a:ea typeface="PingFang SC"/>
                 <a:cs typeface="PingFang SC"/>
               </a:rPr>
-              <a:t>Media Task A</a:t>
-            </a:r>
-          </a:p>
-        </p:txBody>
-      </p:sp>
-      <p:sp>
-        <p:nvSpPr>
-          <p:cNvPr id="16" name="Oval 15"/>
-          <p:cNvSpPr/>
-          <p:nvPr/>
-        </p:nvSpPr>
-        <p:spPr>
-          <a:xfrm>
-            <a:off x="4434840" y="3858768"/>
-            <a:ext cx="91440" cy="91440"/>
-          </a:xfrm>
-          <a:prstGeom prst="ellipse">
-            <a:avLst/>
-          </a:prstGeom>
-          <a:solidFill>
-            <a:srgbClr val="C98A2B"/>
-          </a:solidFill>
-          <a:ln>
-            <a:noFill/>
-          </a:ln>
-          <a:effectLst/>
-        </p:spPr>
-        <p:style>
-          <a:lnRef idx="1">
-            <a:schemeClr val="accent1"/>
-          </a:lnRef>
-          <a:fillRef idx="3">
-            <a:schemeClr val="accent1"/>
-          </a:fillRef>
-          <a:effectRef idx="2">
-            <a:schemeClr val="accent1"/>
-          </a:effectRef>
-          <a:fontRef idx="minor">
-            <a:schemeClr val="lt1"/>
-          </a:fontRef>
-        </p:style>
-        <p:txBody>
-          <a:bodyPr rtlCol="0" anchor="ctr"/>
+              <a:t>工艺模版</a:t>
+            </a:r>
+          </a:p>
+        </p:txBody>
+      </p:sp>
+      <p:cxnSp>
+        <p:nvCxnSpPr>
+          <p:cNvPr id="16" name="Connector 15"/>
+          <p:cNvCxnSpPr/>
+          <p:nvPr/>
+        </p:nvCxnSpPr>
+        <p:spPr>
+          <a:xfrm>
+            <a:off x="2093976" y="3712464"/>
+            <a:ext cx="173736" cy="0"/>
+          </a:xfrm>
+          <a:prstGeom prst="line">
+            <a:avLst/>
+          </a:prstGeom>
+          <a:ln w="16510">
+            <a:solidFill>
+              <a:srgbClr val="86868B"/>
+            </a:solidFill>
+            <a:tailEnd type="triangle" w="med" len="med"/>
+          </a:ln>
+          <a:effectLst/>
+        </p:spPr>
+        <p:style>
+          <a:lnRef idx="2">
+            <a:schemeClr val="accent1"/>
+          </a:lnRef>
+          <a:fillRef idx="0">
+            <a:schemeClr val="accent1"/>
+          </a:fillRef>
+          <a:effectRef idx="1">
+            <a:schemeClr val="accent1"/>
+          </a:effectRef>
+          <a:fontRef idx="minor">
+            <a:schemeClr val="tx1"/>
+          </a:fontRef>
+        </p:style>
+      </p:cxnSp>
+      <p:sp>
+        <p:nvSpPr>
+          <p:cNvPr id="17" name="Rounded Rectangle 16"/>
+          <p:cNvSpPr/>
+          <p:nvPr/>
+        </p:nvSpPr>
+        <p:spPr>
+          <a:xfrm>
+            <a:off x="2304288" y="3520440"/>
+            <a:ext cx="1417320" cy="384048"/>
+          </a:xfrm>
+          <a:prstGeom prst="roundRect">
+            <a:avLst>
+              <a:gd name="adj" fmla="val 50000"/>
+            </a:avLst>
+          </a:prstGeom>
+          <a:solidFill>
+            <a:srgbClr val="FFFFFF"/>
+          </a:solidFill>
+          <a:ln w="19050">
+            <a:solidFill>
+              <a:srgbClr val="06A59A"/>
+            </a:solidFill>
+          </a:ln>
+          <a:effectLst/>
+        </p:spPr>
+        <p:style>
+          <a:lnRef idx="1">
+            <a:schemeClr val="accent1"/>
+          </a:lnRef>
+          <a:fillRef idx="3">
+            <a:schemeClr val="accent1"/>
+          </a:fillRef>
+          <a:effectRef idx="2">
+            <a:schemeClr val="accent1"/>
+          </a:effectRef>
+          <a:fontRef idx="minor">
+            <a:schemeClr val="lt1"/>
+          </a:fontRef>
+        </p:style>
+        <p:txBody>
+          <a:bodyPr rtlCol="0" anchor="ctr" wrap="square" lIns="54864" rIns="54864" tIns="18288" bIns="18288"/>
           <a:lstStyle/>
           <a:p>
             <a:pPr algn="ctr"/>
-          </a:p>
-        </p:txBody>
-      </p:sp>
-      <p:sp>
-        <p:nvSpPr>
-          <p:cNvPr id="17" name="TextBox 16"/>
+            <a:r>
+              <a:rPr sz="1200" b="1">
+                <a:solidFill>
+                  <a:srgbClr val="06A59A"/>
+                </a:solidFill>
+                <a:latin typeface="PingFang SC"/>
+                <a:ea typeface="PingFang SC"/>
+                <a:cs typeface="PingFang SC"/>
+              </a:rPr>
+              <a:t>工艺阶段</a:t>
+            </a:r>
+          </a:p>
+        </p:txBody>
+      </p:sp>
+      <p:cxnSp>
+        <p:nvCxnSpPr>
+          <p:cNvPr id="18" name="Connector 17"/>
+          <p:cNvCxnSpPr/>
+          <p:nvPr/>
+        </p:nvCxnSpPr>
+        <p:spPr>
+          <a:xfrm>
+            <a:off x="3758184" y="3712464"/>
+            <a:ext cx="173736" cy="0"/>
+          </a:xfrm>
+          <a:prstGeom prst="line">
+            <a:avLst/>
+          </a:prstGeom>
+          <a:ln w="16510">
+            <a:solidFill>
+              <a:srgbClr val="86868B"/>
+            </a:solidFill>
+            <a:tailEnd type="triangle" w="med" len="med"/>
+          </a:ln>
+          <a:effectLst/>
+        </p:spPr>
+        <p:style>
+          <a:lnRef idx="2">
+            <a:schemeClr val="accent1"/>
+          </a:lnRef>
+          <a:fillRef idx="0">
+            <a:schemeClr val="accent1"/>
+          </a:fillRef>
+          <a:effectRef idx="1">
+            <a:schemeClr val="accent1"/>
+          </a:effectRef>
+          <a:fontRef idx="minor">
+            <a:schemeClr val="tx1"/>
+          </a:fontRef>
+        </p:style>
+      </p:cxnSp>
+      <p:sp>
+        <p:nvSpPr>
+          <p:cNvPr id="19" name="Rounded Rectangle 18"/>
+          <p:cNvSpPr/>
+          <p:nvPr/>
+        </p:nvSpPr>
+        <p:spPr>
+          <a:xfrm>
+            <a:off x="3968496" y="3520440"/>
+            <a:ext cx="1417320" cy="384048"/>
+          </a:xfrm>
+          <a:prstGeom prst="roundRect">
+            <a:avLst>
+              <a:gd name="adj" fmla="val 50000"/>
+            </a:avLst>
+          </a:prstGeom>
+          <a:solidFill>
+            <a:srgbClr val="FFFFFF"/>
+          </a:solidFill>
+          <a:ln w="19050">
+            <a:solidFill>
+              <a:srgbClr val="34A06B"/>
+            </a:solidFill>
+          </a:ln>
+          <a:effectLst/>
+        </p:spPr>
+        <p:style>
+          <a:lnRef idx="1">
+            <a:schemeClr val="accent1"/>
+          </a:lnRef>
+          <a:fillRef idx="3">
+            <a:schemeClr val="accent1"/>
+          </a:fillRef>
+          <a:effectRef idx="2">
+            <a:schemeClr val="accent1"/>
+          </a:effectRef>
+          <a:fontRef idx="minor">
+            <a:schemeClr val="lt1"/>
+          </a:fontRef>
+        </p:style>
+        <p:txBody>
+          <a:bodyPr rtlCol="0" anchor="ctr" wrap="square" lIns="54864" rIns="54864" tIns="18288" bIns="18288"/>
+          <a:lstStyle/>
+          <a:p>
+            <a:pPr algn="ctr"/>
+            <a:r>
+              <a:rPr sz="1200" b="1">
+                <a:solidFill>
+                  <a:srgbClr val="34A06B"/>
+                </a:solidFill>
+                <a:latin typeface="PingFang SC"/>
+                <a:ea typeface="PingFang SC"/>
+                <a:cs typeface="PingFang SC"/>
+              </a:rPr>
+              <a:t>标准操作</a:t>
+            </a:r>
+          </a:p>
+        </p:txBody>
+      </p:sp>
+      <p:sp>
+        <p:nvSpPr>
+          <p:cNvPr id="20" name="TextBox 19"/>
           <p:cNvSpPr txBox="1"/>
           <p:nvPr/>
         </p:nvSpPr>
         <p:spPr>
           <a:xfrm>
-            <a:off x="4590288" y="3781044"/>
-            <a:ext cx="960120" cy="256032"/>
+            <a:off x="640080" y="4059936"/>
+            <a:ext cx="2743200" cy="749808"/>
           </a:xfrm>
           <a:prstGeom prst="rect">
             <a:avLst/>
@@ -3831,132 +3979,29 @@
               </a:lnSpc>
             </a:pPr>
             <a:r>
-              <a:rPr sz="950" b="1">
-                <a:solidFill>
-                  <a:srgbClr val="86868B"/>
+              <a:rPr sz="3800" b="1">
+                <a:solidFill>
+                  <a:srgbClr val="0071E3"/>
                 </a:solidFill>
                 <a:latin typeface="PingFang SC"/>
                 <a:ea typeface="PingFang SC"/>
                 <a:cs typeface="PingFang SC"/>
               </a:rPr>
-              <a:t>MEDIA</a:t>
-            </a:r>
-          </a:p>
-        </p:txBody>
-      </p:sp>
-      <p:sp>
-        <p:nvSpPr>
-          <p:cNvPr id="18" name="Rounded Rectangle 17"/>
-          <p:cNvSpPr/>
-          <p:nvPr/>
-        </p:nvSpPr>
-        <p:spPr>
-          <a:xfrm>
-            <a:off x="640080" y="4201668"/>
-            <a:ext cx="5029200" cy="402336"/>
-          </a:xfrm>
-          <a:prstGeom prst="roundRect">
-            <a:avLst>
-              <a:gd name="adj" fmla="val 22000"/>
-            </a:avLst>
-          </a:prstGeom>
-          <a:solidFill>
-            <a:srgbClr val="FFFFFF"/>
-          </a:solidFill>
-          <a:ln w="12700">
-            <a:solidFill>
-              <a:srgbClr val="D8DBE0"/>
-            </a:solidFill>
-          </a:ln>
-          <a:effectLst/>
-        </p:spPr>
-        <p:style>
-          <a:lnRef idx="1">
-            <a:schemeClr val="accent1"/>
-          </a:lnRef>
-          <a:fillRef idx="3">
-            <a:schemeClr val="accent1"/>
-          </a:fillRef>
-          <a:effectRef idx="2">
-            <a:schemeClr val="accent1"/>
-          </a:effectRef>
-          <a:fontRef idx="minor">
-            <a:schemeClr val="lt1"/>
-          </a:fontRef>
-        </p:style>
-        <p:txBody>
-          <a:bodyPr rtlCol="0" anchor="ctr" wrap="square" lIns="164592" rIns="54864" tIns="18288" bIns="18288"/>
-          <a:lstStyle/>
-          <a:p>
-            <a:pPr algn="l"/>
-            <a:r>
-              <a:rPr sz="1300" b="1">
-                <a:solidFill>
-                  <a:srgbClr val="1D1D1F"/>
-                </a:solidFill>
-                <a:latin typeface="PingFang SC"/>
-                <a:ea typeface="PingFang SC"/>
-                <a:cs typeface="PingFang SC"/>
-              </a:rPr>
-              <a:t>Buffer Task A</a:t>
-            </a:r>
-          </a:p>
-        </p:txBody>
-      </p:sp>
-      <p:sp>
-        <p:nvSpPr>
-          <p:cNvPr id="19" name="Oval 18"/>
-          <p:cNvSpPr/>
-          <p:nvPr/>
-        </p:nvSpPr>
-        <p:spPr>
-          <a:xfrm>
-            <a:off x="4434840" y="4357116"/>
-            <a:ext cx="91440" cy="91440"/>
-          </a:xfrm>
-          <a:prstGeom prst="ellipse">
-            <a:avLst/>
-          </a:prstGeom>
-          <a:solidFill>
-            <a:srgbClr val="0A9D92"/>
-          </a:solidFill>
-          <a:ln>
-            <a:noFill/>
-          </a:ln>
-          <a:effectLst/>
-        </p:spPr>
-        <p:style>
-          <a:lnRef idx="1">
-            <a:schemeClr val="accent1"/>
-          </a:lnRef>
-          <a:fillRef idx="3">
-            <a:schemeClr val="accent1"/>
-          </a:fillRef>
-          <a:effectRef idx="2">
-            <a:schemeClr val="accent1"/>
-          </a:effectRef>
-          <a:fontRef idx="minor">
-            <a:schemeClr val="lt1"/>
-          </a:fontRef>
-        </p:style>
-        <p:txBody>
-          <a:bodyPr rtlCol="0" anchor="ctr"/>
-          <a:lstStyle/>
-          <a:p>
-            <a:pPr algn="ctr"/>
-          </a:p>
-        </p:txBody>
-      </p:sp>
-      <p:sp>
-        <p:nvSpPr>
-          <p:cNvPr id="20" name="TextBox 19"/>
+              <a:t>4 h</a:t>
+            </a:r>
+          </a:p>
+        </p:txBody>
+      </p:sp>
+      <p:sp>
+        <p:nvSpPr>
+          <p:cNvPr id="21" name="TextBox 20"/>
           <p:cNvSpPr txBox="1"/>
           <p:nvPr/>
         </p:nvSpPr>
         <p:spPr>
           <a:xfrm>
-            <a:off x="4590288" y="4279392"/>
-            <a:ext cx="960120" cy="256032"/>
+            <a:off x="640080" y="4773168"/>
+            <a:ext cx="4114800" cy="320040"/>
           </a:xfrm>
           <a:prstGeom prst="rect">
             <a:avLst/>
@@ -3975,33 +4020,33 @@
               </a:lnSpc>
             </a:pPr>
             <a:r>
-              <a:rPr sz="950" b="1">
-                <a:solidFill>
-                  <a:srgbClr val="86868B"/>
+              <a:rPr sz="1200" b="0">
+                <a:solidFill>
+                  <a:srgbClr val="515154"/>
                 </a:solidFill>
                 <a:latin typeface="PingFang SC"/>
                 <a:ea typeface="PingFang SC"/>
                 <a:cs typeface="PingFang SC"/>
               </a:rPr>
-              <a:t>BUFFER</a:t>
-            </a:r>
-          </a:p>
-        </p:txBody>
-      </p:sp>
-      <p:sp>
-        <p:nvSpPr>
-          <p:cNvPr id="21" name="Rounded Rectangle 20"/>
-          <p:cNvSpPr/>
-          <p:nvPr/>
-        </p:nvSpPr>
-        <p:spPr>
-          <a:xfrm>
-            <a:off x="640080" y="4700016"/>
-            <a:ext cx="5029200" cy="402336"/>
+              <a:t>完整建模一个部门全工艺</a:t>
+            </a:r>
+          </a:p>
+        </p:txBody>
+      </p:sp>
+      <p:sp>
+        <p:nvSpPr>
+          <p:cNvPr id="22" name="Rounded Rectangle 21"/>
+          <p:cNvSpPr/>
+          <p:nvPr/>
+        </p:nvSpPr>
+        <p:spPr>
+          <a:xfrm>
+            <a:off x="6217920" y="1280160"/>
+            <a:ext cx="5577840" cy="3520440"/>
           </a:xfrm>
           <a:prstGeom prst="roundRect">
             <a:avLst>
-              <a:gd name="adj" fmla="val 22000"/>
+              <a:gd name="adj" fmla="val 4000"/>
             </a:avLst>
           </a:prstGeom>
           <a:solidFill>
@@ -4029,582 +4074,6 @@
           </a:fontRef>
         </p:style>
         <p:txBody>
-          <a:bodyPr rtlCol="0" anchor="ctr" wrap="square" lIns="164592" rIns="54864" tIns="18288" bIns="18288"/>
-          <a:lstStyle/>
-          <a:p>
-            <a:pPr algn="l"/>
-            <a:r>
-              <a:rPr sz="1300" b="1">
-                <a:solidFill>
-                  <a:srgbClr val="1D1D1F"/>
-                </a:solidFill>
-                <a:latin typeface="PingFang SC"/>
-                <a:ea typeface="PingFang SC"/>
-                <a:cs typeface="PingFang SC"/>
-              </a:rPr>
-              <a:t>USP Task A</a:t>
-            </a:r>
-          </a:p>
-        </p:txBody>
-      </p:sp>
-      <p:sp>
-        <p:nvSpPr>
-          <p:cNvPr id="22" name="Oval 21"/>
-          <p:cNvSpPr/>
-          <p:nvPr/>
-        </p:nvSpPr>
-        <p:spPr>
-          <a:xfrm>
-            <a:off x="4434840" y="4855464"/>
-            <a:ext cx="91440" cy="91440"/>
-          </a:xfrm>
-          <a:prstGeom prst="ellipse">
-            <a:avLst/>
-          </a:prstGeom>
-          <a:solidFill>
-            <a:srgbClr val="0071E3"/>
-          </a:solidFill>
-          <a:ln>
-            <a:noFill/>
-          </a:ln>
-          <a:effectLst/>
-        </p:spPr>
-        <p:style>
-          <a:lnRef idx="1">
-            <a:schemeClr val="accent1"/>
-          </a:lnRef>
-          <a:fillRef idx="3">
-            <a:schemeClr val="accent1"/>
-          </a:fillRef>
-          <a:effectRef idx="2">
-            <a:schemeClr val="accent1"/>
-          </a:effectRef>
-          <a:fontRef idx="minor">
-            <a:schemeClr val="lt1"/>
-          </a:fontRef>
-        </p:style>
-        <p:txBody>
-          <a:bodyPr rtlCol="0" anchor="ctr"/>
-          <a:lstStyle/>
-          <a:p>
-            <a:pPr algn="ctr"/>
-          </a:p>
-        </p:txBody>
-      </p:sp>
-      <p:sp>
-        <p:nvSpPr>
-          <p:cNvPr id="23" name="TextBox 22"/>
-          <p:cNvSpPr txBox="1"/>
-          <p:nvPr/>
-        </p:nvSpPr>
-        <p:spPr>
-          <a:xfrm>
-            <a:off x="4590288" y="4777740"/>
-            <a:ext cx="960120" cy="256032"/>
-          </a:xfrm>
-          <a:prstGeom prst="rect">
-            <a:avLst/>
-          </a:prstGeom>
-          <a:noFill/>
-        </p:spPr>
-        <p:txBody>
-          <a:bodyPr wrap="square" anchor="t" lIns="0" rIns="0" tIns="0" bIns="0">
-            <a:spAutoFit/>
-          </a:bodyPr>
-          <a:lstStyle/>
-          <a:p>
-            <a:pPr algn="l">
-              <a:lnSpc>
-                <a:spcPct val="105000"/>
-              </a:lnSpc>
-            </a:pPr>
-            <a:r>
-              <a:rPr sz="950" b="1">
-                <a:solidFill>
-                  <a:srgbClr val="86868B"/>
-                </a:solidFill>
-                <a:latin typeface="PingFang SC"/>
-                <a:ea typeface="PingFang SC"/>
-                <a:cs typeface="PingFang SC"/>
-              </a:rPr>
-              <a:t>上游</a:t>
-            </a:r>
-          </a:p>
-        </p:txBody>
-      </p:sp>
-      <p:sp>
-        <p:nvSpPr>
-          <p:cNvPr id="24" name="Rounded Rectangle 23"/>
-          <p:cNvSpPr/>
-          <p:nvPr/>
-        </p:nvSpPr>
-        <p:spPr>
-          <a:xfrm>
-            <a:off x="640080" y="5198364"/>
-            <a:ext cx="5029200" cy="402336"/>
-          </a:xfrm>
-          <a:prstGeom prst="roundRect">
-            <a:avLst>
-              <a:gd name="adj" fmla="val 22000"/>
-            </a:avLst>
-          </a:prstGeom>
-          <a:solidFill>
-            <a:srgbClr val="FFFFFF"/>
-          </a:solidFill>
-          <a:ln w="12700">
-            <a:solidFill>
-              <a:srgbClr val="D8DBE0"/>
-            </a:solidFill>
-          </a:ln>
-          <a:effectLst/>
-        </p:spPr>
-        <p:style>
-          <a:lnRef idx="1">
-            <a:schemeClr val="accent1"/>
-          </a:lnRef>
-          <a:fillRef idx="3">
-            <a:schemeClr val="accent1"/>
-          </a:fillRef>
-          <a:effectRef idx="2">
-            <a:schemeClr val="accent1"/>
-          </a:effectRef>
-          <a:fontRef idx="minor">
-            <a:schemeClr val="lt1"/>
-          </a:fontRef>
-        </p:style>
-        <p:txBody>
-          <a:bodyPr rtlCol="0" anchor="ctr" wrap="square" lIns="164592" rIns="54864" tIns="18288" bIns="18288"/>
-          <a:lstStyle/>
-          <a:p>
-            <a:pPr algn="l"/>
-            <a:r>
-              <a:rPr sz="1300" b="1">
-                <a:solidFill>
-                  <a:srgbClr val="1D1D1F"/>
-                </a:solidFill>
-                <a:latin typeface="PingFang SC"/>
-                <a:ea typeface="PingFang SC"/>
-                <a:cs typeface="PingFang SC"/>
-              </a:rPr>
-              <a:t>USP Task B</a:t>
-            </a:r>
-          </a:p>
-        </p:txBody>
-      </p:sp>
-      <p:sp>
-        <p:nvSpPr>
-          <p:cNvPr id="25" name="Oval 24"/>
-          <p:cNvSpPr/>
-          <p:nvPr/>
-        </p:nvSpPr>
-        <p:spPr>
-          <a:xfrm>
-            <a:off x="4434840" y="5353812"/>
-            <a:ext cx="91440" cy="91440"/>
-          </a:xfrm>
-          <a:prstGeom prst="ellipse">
-            <a:avLst/>
-          </a:prstGeom>
-          <a:solidFill>
-            <a:srgbClr val="0071E3"/>
-          </a:solidFill>
-          <a:ln>
-            <a:noFill/>
-          </a:ln>
-          <a:effectLst/>
-        </p:spPr>
-        <p:style>
-          <a:lnRef idx="1">
-            <a:schemeClr val="accent1"/>
-          </a:lnRef>
-          <a:fillRef idx="3">
-            <a:schemeClr val="accent1"/>
-          </a:fillRef>
-          <a:effectRef idx="2">
-            <a:schemeClr val="accent1"/>
-          </a:effectRef>
-          <a:fontRef idx="minor">
-            <a:schemeClr val="lt1"/>
-          </a:fontRef>
-        </p:style>
-        <p:txBody>
-          <a:bodyPr rtlCol="0" anchor="ctr"/>
-          <a:lstStyle/>
-          <a:p>
-            <a:pPr algn="ctr"/>
-          </a:p>
-        </p:txBody>
-      </p:sp>
-      <p:sp>
-        <p:nvSpPr>
-          <p:cNvPr id="26" name="TextBox 25"/>
-          <p:cNvSpPr txBox="1"/>
-          <p:nvPr/>
-        </p:nvSpPr>
-        <p:spPr>
-          <a:xfrm>
-            <a:off x="4590288" y="5276088"/>
-            <a:ext cx="960120" cy="256032"/>
-          </a:xfrm>
-          <a:prstGeom prst="rect">
-            <a:avLst/>
-          </a:prstGeom>
-          <a:noFill/>
-        </p:spPr>
-        <p:txBody>
-          <a:bodyPr wrap="square" anchor="t" lIns="0" rIns="0" tIns="0" bIns="0">
-            <a:spAutoFit/>
-          </a:bodyPr>
-          <a:lstStyle/>
-          <a:p>
-            <a:pPr algn="l">
-              <a:lnSpc>
-                <a:spcPct val="105000"/>
-              </a:lnSpc>
-            </a:pPr>
-            <a:r>
-              <a:rPr sz="950" b="1">
-                <a:solidFill>
-                  <a:srgbClr val="86868B"/>
-                </a:solidFill>
-                <a:latin typeface="PingFang SC"/>
-                <a:ea typeface="PingFang SC"/>
-                <a:cs typeface="PingFang SC"/>
-              </a:rPr>
-              <a:t>上游</a:t>
-            </a:r>
-          </a:p>
-        </p:txBody>
-      </p:sp>
-      <p:sp>
-        <p:nvSpPr>
-          <p:cNvPr id="27" name="Rounded Rectangle 26"/>
-          <p:cNvSpPr/>
-          <p:nvPr/>
-        </p:nvSpPr>
-        <p:spPr>
-          <a:xfrm>
-            <a:off x="640080" y="5696712"/>
-            <a:ext cx="5029200" cy="402336"/>
-          </a:xfrm>
-          <a:prstGeom prst="roundRect">
-            <a:avLst>
-              <a:gd name="adj" fmla="val 22000"/>
-            </a:avLst>
-          </a:prstGeom>
-          <a:solidFill>
-            <a:srgbClr val="FFFFFF"/>
-          </a:solidFill>
-          <a:ln w="12700">
-            <a:solidFill>
-              <a:srgbClr val="D8DBE0"/>
-            </a:solidFill>
-          </a:ln>
-          <a:effectLst/>
-        </p:spPr>
-        <p:style>
-          <a:lnRef idx="1">
-            <a:schemeClr val="accent1"/>
-          </a:lnRef>
-          <a:fillRef idx="3">
-            <a:schemeClr val="accent1"/>
-          </a:fillRef>
-          <a:effectRef idx="2">
-            <a:schemeClr val="accent1"/>
-          </a:effectRef>
-          <a:fontRef idx="minor">
-            <a:schemeClr val="lt1"/>
-          </a:fontRef>
-        </p:style>
-        <p:txBody>
-          <a:bodyPr rtlCol="0" anchor="ctr" wrap="square" lIns="164592" rIns="54864" tIns="18288" bIns="18288"/>
-          <a:lstStyle/>
-          <a:p>
-            <a:pPr algn="l"/>
-            <a:r>
-              <a:rPr sz="1300" b="1">
-                <a:solidFill>
-                  <a:srgbClr val="1D1D1F"/>
-                </a:solidFill>
-                <a:latin typeface="PingFang SC"/>
-                <a:ea typeface="PingFang SC"/>
-                <a:cs typeface="PingFang SC"/>
-              </a:rPr>
-              <a:t>DSP Task A</a:t>
-            </a:r>
-          </a:p>
-        </p:txBody>
-      </p:sp>
-      <p:sp>
-        <p:nvSpPr>
-          <p:cNvPr id="28" name="Oval 27"/>
-          <p:cNvSpPr/>
-          <p:nvPr/>
-        </p:nvSpPr>
-        <p:spPr>
-          <a:xfrm>
-            <a:off x="4434840" y="5852159"/>
-            <a:ext cx="91440" cy="91440"/>
-          </a:xfrm>
-          <a:prstGeom prst="ellipse">
-            <a:avLst/>
-          </a:prstGeom>
-          <a:solidFill>
-            <a:srgbClr val="34A06B"/>
-          </a:solidFill>
-          <a:ln>
-            <a:noFill/>
-          </a:ln>
-          <a:effectLst/>
-        </p:spPr>
-        <p:style>
-          <a:lnRef idx="1">
-            <a:schemeClr val="accent1"/>
-          </a:lnRef>
-          <a:fillRef idx="3">
-            <a:schemeClr val="accent1"/>
-          </a:fillRef>
-          <a:effectRef idx="2">
-            <a:schemeClr val="accent1"/>
-          </a:effectRef>
-          <a:fontRef idx="minor">
-            <a:schemeClr val="lt1"/>
-          </a:fontRef>
-        </p:style>
-        <p:txBody>
-          <a:bodyPr rtlCol="0" anchor="ctr"/>
-          <a:lstStyle/>
-          <a:p>
-            <a:pPr algn="ctr"/>
-          </a:p>
-        </p:txBody>
-      </p:sp>
-      <p:sp>
-        <p:nvSpPr>
-          <p:cNvPr id="29" name="TextBox 28"/>
-          <p:cNvSpPr txBox="1"/>
-          <p:nvPr/>
-        </p:nvSpPr>
-        <p:spPr>
-          <a:xfrm>
-            <a:off x="4590288" y="5774436"/>
-            <a:ext cx="960120" cy="256032"/>
-          </a:xfrm>
-          <a:prstGeom prst="rect">
-            <a:avLst/>
-          </a:prstGeom>
-          <a:noFill/>
-        </p:spPr>
-        <p:txBody>
-          <a:bodyPr wrap="square" anchor="t" lIns="0" rIns="0" tIns="0" bIns="0">
-            <a:spAutoFit/>
-          </a:bodyPr>
-          <a:lstStyle/>
-          <a:p>
-            <a:pPr algn="l">
-              <a:lnSpc>
-                <a:spcPct val="105000"/>
-              </a:lnSpc>
-            </a:pPr>
-            <a:r>
-              <a:rPr sz="950" b="1">
-                <a:solidFill>
-                  <a:srgbClr val="86868B"/>
-                </a:solidFill>
-                <a:latin typeface="PingFang SC"/>
-                <a:ea typeface="PingFang SC"/>
-                <a:cs typeface="PingFang SC"/>
-              </a:rPr>
-              <a:t>下游</a:t>
-            </a:r>
-          </a:p>
-        </p:txBody>
-      </p:sp>
-      <p:sp>
-        <p:nvSpPr>
-          <p:cNvPr id="30" name="Rounded Rectangle 29"/>
-          <p:cNvSpPr/>
-          <p:nvPr/>
-        </p:nvSpPr>
-        <p:spPr>
-          <a:xfrm>
-            <a:off x="640080" y="6195059"/>
-            <a:ext cx="5029200" cy="402336"/>
-          </a:xfrm>
-          <a:prstGeom prst="roundRect">
-            <a:avLst>
-              <a:gd name="adj" fmla="val 22000"/>
-            </a:avLst>
-          </a:prstGeom>
-          <a:solidFill>
-            <a:srgbClr val="FFFFFF"/>
-          </a:solidFill>
-          <a:ln w="12700">
-            <a:solidFill>
-              <a:srgbClr val="D8DBE0"/>
-            </a:solidFill>
-          </a:ln>
-          <a:effectLst/>
-        </p:spPr>
-        <p:style>
-          <a:lnRef idx="1">
-            <a:schemeClr val="accent1"/>
-          </a:lnRef>
-          <a:fillRef idx="3">
-            <a:schemeClr val="accent1"/>
-          </a:fillRef>
-          <a:effectRef idx="2">
-            <a:schemeClr val="accent1"/>
-          </a:effectRef>
-          <a:fontRef idx="minor">
-            <a:schemeClr val="lt1"/>
-          </a:fontRef>
-        </p:style>
-        <p:txBody>
-          <a:bodyPr rtlCol="0" anchor="ctr" wrap="square" lIns="164592" rIns="54864" tIns="18288" bIns="18288"/>
-          <a:lstStyle/>
-          <a:p>
-            <a:pPr algn="l"/>
-            <a:r>
-              <a:rPr sz="1300" b="1">
-                <a:solidFill>
-                  <a:srgbClr val="1D1D1F"/>
-                </a:solidFill>
-                <a:latin typeface="PingFang SC"/>
-                <a:ea typeface="PingFang SC"/>
-                <a:cs typeface="PingFang SC"/>
-              </a:rPr>
-              <a:t>DSP Task B</a:t>
-            </a:r>
-          </a:p>
-        </p:txBody>
-      </p:sp>
-      <p:sp>
-        <p:nvSpPr>
-          <p:cNvPr id="31" name="Oval 30"/>
-          <p:cNvSpPr/>
-          <p:nvPr/>
-        </p:nvSpPr>
-        <p:spPr>
-          <a:xfrm>
-            <a:off x="4434840" y="6350507"/>
-            <a:ext cx="91440" cy="91440"/>
-          </a:xfrm>
-          <a:prstGeom prst="ellipse">
-            <a:avLst/>
-          </a:prstGeom>
-          <a:solidFill>
-            <a:srgbClr val="34A06B"/>
-          </a:solidFill>
-          <a:ln>
-            <a:noFill/>
-          </a:ln>
-          <a:effectLst/>
-        </p:spPr>
-        <p:style>
-          <a:lnRef idx="1">
-            <a:schemeClr val="accent1"/>
-          </a:lnRef>
-          <a:fillRef idx="3">
-            <a:schemeClr val="accent1"/>
-          </a:fillRef>
-          <a:effectRef idx="2">
-            <a:schemeClr val="accent1"/>
-          </a:effectRef>
-          <a:fontRef idx="minor">
-            <a:schemeClr val="lt1"/>
-          </a:fontRef>
-        </p:style>
-        <p:txBody>
-          <a:bodyPr rtlCol="0" anchor="ctr"/>
-          <a:lstStyle/>
-          <a:p>
-            <a:pPr algn="ctr"/>
-          </a:p>
-        </p:txBody>
-      </p:sp>
-      <p:sp>
-        <p:nvSpPr>
-          <p:cNvPr id="32" name="TextBox 31"/>
-          <p:cNvSpPr txBox="1"/>
-          <p:nvPr/>
-        </p:nvSpPr>
-        <p:spPr>
-          <a:xfrm>
-            <a:off x="4590288" y="6272783"/>
-            <a:ext cx="960120" cy="256032"/>
-          </a:xfrm>
-          <a:prstGeom prst="rect">
-            <a:avLst/>
-          </a:prstGeom>
-          <a:noFill/>
-        </p:spPr>
-        <p:txBody>
-          <a:bodyPr wrap="square" anchor="t" lIns="0" rIns="0" tIns="0" bIns="0">
-            <a:spAutoFit/>
-          </a:bodyPr>
-          <a:lstStyle/>
-          <a:p>
-            <a:pPr algn="l">
-              <a:lnSpc>
-                <a:spcPct val="105000"/>
-              </a:lnSpc>
-            </a:pPr>
-            <a:r>
-              <a:rPr sz="950" b="1">
-                <a:solidFill>
-                  <a:srgbClr val="86868B"/>
-                </a:solidFill>
-                <a:latin typeface="PingFang SC"/>
-                <a:ea typeface="PingFang SC"/>
-                <a:cs typeface="PingFang SC"/>
-              </a:rPr>
-              <a:t>下游</a:t>
-            </a:r>
-          </a:p>
-        </p:txBody>
-      </p:sp>
-      <p:sp>
-        <p:nvSpPr>
-          <p:cNvPr id="33" name="Rounded Rectangle 32"/>
-          <p:cNvSpPr/>
-          <p:nvPr/>
-        </p:nvSpPr>
-        <p:spPr>
-          <a:xfrm>
-            <a:off x="6217920" y="1280160"/>
-            <a:ext cx="5577840" cy="3520440"/>
-          </a:xfrm>
-          <a:prstGeom prst="roundRect">
-            <a:avLst>
-              <a:gd name="adj" fmla="val 4000"/>
-            </a:avLst>
-          </a:prstGeom>
-          <a:solidFill>
-            <a:srgbClr val="FFFFFF"/>
-          </a:solidFill>
-          <a:ln w="12700">
-            <a:solidFill>
-              <a:srgbClr val="D8DBE0"/>
-            </a:solidFill>
-          </a:ln>
-          <a:effectLst/>
-        </p:spPr>
-        <p:style>
-          <a:lnRef idx="1">
-            <a:schemeClr val="accent1"/>
-          </a:lnRef>
-          <a:fillRef idx="3">
-            <a:schemeClr val="accent1"/>
-          </a:fillRef>
-          <a:effectRef idx="2">
-            <a:schemeClr val="accent1"/>
-          </a:effectRef>
-          <a:fontRef idx="minor">
-            <a:schemeClr val="lt1"/>
-          </a:fontRef>
-        </p:style>
-        <p:txBody>
           <a:bodyPr rtlCol="0" anchor="ctr" wrap="square"/>
           <a:lstStyle/>
           <a:p>
@@ -4614,7 +4083,7 @@
       </p:sp>
       <p:pic>
         <p:nvPicPr>
-          <p:cNvPr id="34" name="Picture 33" descr="20_process_templates.png"/>
+          <p:cNvPr id="23" name="Picture 22" descr="20_process_templates.png"/>
           <p:cNvPicPr>
             <a:picLocks noChangeAspect="1"/>
           </p:cNvPicPr>
@@ -4638,7 +4107,7 @@
       </p:pic>
       <p:sp>
         <p:nvSpPr>
-          <p:cNvPr id="35" name="TextBox 34"/>
+          <p:cNvPr id="24" name="TextBox 23"/>
           <p:cNvSpPr txBox="1"/>
           <p:nvPr/>
         </p:nvSpPr>
